--- a/paper/slides/paper_deck_new.pptx
+++ b/paper/slides/paper_deck_new.pptx
@@ -6,40 +6,41 @@
     <p:sldMasterId id="2147483672" r:id="rId2"/>
   </p:sldMasterIdLst>
   <p:notesMasterIdLst>
-    <p:notesMasterId r:id="rId34"/>
+    <p:notesMasterId r:id="rId35"/>
   </p:notesMasterIdLst>
   <p:sldIdLst>
     <p:sldId id="256" r:id="rId3"/>
     <p:sldId id="257" r:id="rId4"/>
-    <p:sldId id="258" r:id="rId5"/>
-    <p:sldId id="259" r:id="rId6"/>
-    <p:sldId id="260" r:id="rId7"/>
-    <p:sldId id="261" r:id="rId8"/>
-    <p:sldId id="262" r:id="rId9"/>
-    <p:sldId id="263" r:id="rId10"/>
-    <p:sldId id="264" r:id="rId11"/>
-    <p:sldId id="265" r:id="rId12"/>
-    <p:sldId id="266" r:id="rId13"/>
-    <p:sldId id="267" r:id="rId14"/>
-    <p:sldId id="268" r:id="rId15"/>
-    <p:sldId id="269" r:id="rId16"/>
-    <p:sldId id="270" r:id="rId17"/>
-    <p:sldId id="271" r:id="rId18"/>
-    <p:sldId id="272" r:id="rId19"/>
-    <p:sldId id="273" r:id="rId20"/>
-    <p:sldId id="274" r:id="rId21"/>
-    <p:sldId id="275" r:id="rId22"/>
-    <p:sldId id="276" r:id="rId23"/>
-    <p:sldId id="277" r:id="rId24"/>
-    <p:sldId id="278" r:id="rId25"/>
-    <p:sldId id="279" r:id="rId26"/>
-    <p:sldId id="280" r:id="rId27"/>
-    <p:sldId id="281" r:id="rId28"/>
-    <p:sldId id="282" r:id="rId29"/>
-    <p:sldId id="283" r:id="rId30"/>
-    <p:sldId id="284" r:id="rId31"/>
-    <p:sldId id="285" r:id="rId32"/>
-    <p:sldId id="286" r:id="rId33"/>
+    <p:sldId id="261" r:id="rId5"/>
+    <p:sldId id="262" r:id="rId6"/>
+    <p:sldId id="287" r:id="rId7"/>
+    <p:sldId id="258" r:id="rId8"/>
+    <p:sldId id="259" r:id="rId9"/>
+    <p:sldId id="260" r:id="rId10"/>
+    <p:sldId id="263" r:id="rId11"/>
+    <p:sldId id="264" r:id="rId12"/>
+    <p:sldId id="265" r:id="rId13"/>
+    <p:sldId id="266" r:id="rId14"/>
+    <p:sldId id="267" r:id="rId15"/>
+    <p:sldId id="268" r:id="rId16"/>
+    <p:sldId id="269" r:id="rId17"/>
+    <p:sldId id="270" r:id="rId18"/>
+    <p:sldId id="271" r:id="rId19"/>
+    <p:sldId id="272" r:id="rId20"/>
+    <p:sldId id="273" r:id="rId21"/>
+    <p:sldId id="274" r:id="rId22"/>
+    <p:sldId id="275" r:id="rId23"/>
+    <p:sldId id="276" r:id="rId24"/>
+    <p:sldId id="277" r:id="rId25"/>
+    <p:sldId id="278" r:id="rId26"/>
+    <p:sldId id="279" r:id="rId27"/>
+    <p:sldId id="280" r:id="rId28"/>
+    <p:sldId id="281" r:id="rId29"/>
+    <p:sldId id="282" r:id="rId30"/>
+    <p:sldId id="283" r:id="rId31"/>
+    <p:sldId id="284" r:id="rId32"/>
+    <p:sldId id="285" r:id="rId33"/>
+    <p:sldId id="286" r:id="rId34"/>
   </p:sldIdLst>
   <p:sldSz cx="9144000" cy="5143500" type="screen16x9"/>
   <p:notesSz cx="6858000" cy="9144000"/>
@@ -1049,6 +1050,222 @@
   <p:cSld>
     <p:spTree>
       <p:nvGrpSpPr>
+        <p:cNvPr id="1" name="Shape 161"/>
+        <p:cNvGrpSpPr/>
+        <p:nvPr/>
+      </p:nvGrpSpPr>
+      <p:grpSpPr>
+        <a:xfrm>
+          <a:off x="0" y="0"/>
+          <a:ext cx="0" cy="0"/>
+          <a:chOff x="0" y="0"/>
+          <a:chExt cx="0" cy="0"/>
+        </a:xfrm>
+      </p:grpSpPr>
+      <p:sp>
+        <p:nvSpPr>
+          <p:cNvPr id="162" name="Google Shape;162;g3f1fc49350a_0_20:notes"/>
+          <p:cNvSpPr txBox="1">
+            <a:spLocks noGrp="1"/>
+          </p:cNvSpPr>
+          <p:nvPr>
+            <p:ph type="body" idx="1"/>
+          </p:nvPr>
+        </p:nvSpPr>
+        <p:spPr>
+          <a:xfrm>
+            <a:off x="685800" y="4343400"/>
+            <a:ext cx="5486400" cy="4114800"/>
+          </a:xfrm>
+          <a:prstGeom prst="rect">
+            <a:avLst/>
+          </a:prstGeom>
+          <a:noFill/>
+          <a:ln>
+            <a:noFill/>
+          </a:ln>
+        </p:spPr>
+        <p:txBody>
+          <a:bodyPr spcFirstLastPara="1" wrap="square" lIns="91425" tIns="91425" rIns="91425" bIns="91425" anchor="ctr" anchorCtr="0">
+            <a:noAutofit/>
+          </a:bodyPr>
+          <a:lstStyle/>
+          <a:p>
+            <a:pPr marL="0" lvl="0" indent="0" algn="l" rtl="0">
+              <a:spcBef>
+                <a:spcPts val="0"/>
+              </a:spcBef>
+              <a:spcAft>
+                <a:spcPts val="0"/>
+              </a:spcAft>
+              <a:buNone/>
+            </a:pPr>
+            <a:endParaRPr/>
+          </a:p>
+        </p:txBody>
+      </p:sp>
+      <p:sp>
+        <p:nvSpPr>
+          <p:cNvPr id="163" name="Google Shape;163;g3f1fc49350a_0_20:notes"/>
+          <p:cNvSpPr>
+            <a:spLocks noGrp="1" noRot="1" noChangeAspect="1"/>
+          </p:cNvSpPr>
+          <p:nvPr>
+            <p:ph type="sldImg" idx="2"/>
+          </p:nvPr>
+        </p:nvSpPr>
+        <p:spPr>
+          <a:xfrm>
+            <a:off x="381000" y="685800"/>
+            <a:ext cx="6096000" cy="3429000"/>
+          </a:xfrm>
+          <a:custGeom>
+            <a:avLst/>
+            <a:gdLst/>
+            <a:ahLst/>
+            <a:cxnLst/>
+            <a:rect l="l" t="t" r="r" b="b"/>
+            <a:pathLst>
+              <a:path w="120000" h="120000" extrusionOk="0">
+                <a:moveTo>
+                  <a:pt x="0" y="0"/>
+                </a:moveTo>
+                <a:lnTo>
+                  <a:pt x="120000" y="0"/>
+                </a:lnTo>
+                <a:lnTo>
+                  <a:pt x="120000" y="120000"/>
+                </a:lnTo>
+                <a:lnTo>
+                  <a:pt x="0" y="120000"/>
+                </a:lnTo>
+                <a:close/>
+              </a:path>
+            </a:pathLst>
+          </a:custGeom>
+        </p:spPr>
+      </p:sp>
+    </p:spTree>
+  </p:cSld>
+  <p:clrMapOvr>
+    <a:masterClrMapping/>
+  </p:clrMapOvr>
+</p:notes>
+</file>
+
+<file path=ppt/notesSlides/notesSlide4.xml><?xml version="1.0" encoding="utf-8"?>
+<p:notes xmlns:a="http://schemas.openxmlformats.org/drawingml/2006/main" xmlns:r="http://schemas.openxmlformats.org/officeDocument/2006/relationships" xmlns:p="http://schemas.openxmlformats.org/presentationml/2006/main" showMasterSp="0" showMasterPhAnim="0">
+  <p:cSld>
+    <p:spTree>
+      <p:nvGrpSpPr>
+        <p:cNvPr id="1" name="Shape 168"/>
+        <p:cNvGrpSpPr/>
+        <p:nvPr/>
+      </p:nvGrpSpPr>
+      <p:grpSpPr>
+        <a:xfrm>
+          <a:off x="0" y="0"/>
+          <a:ext cx="0" cy="0"/>
+          <a:chOff x="0" y="0"/>
+          <a:chExt cx="0" cy="0"/>
+        </a:xfrm>
+      </p:grpSpPr>
+      <p:sp>
+        <p:nvSpPr>
+          <p:cNvPr id="169" name="Google Shape;169;g3f1fc49350a_0_311:notes"/>
+          <p:cNvSpPr txBox="1">
+            <a:spLocks noGrp="1"/>
+          </p:cNvSpPr>
+          <p:nvPr>
+            <p:ph type="body" idx="1"/>
+          </p:nvPr>
+        </p:nvSpPr>
+        <p:spPr>
+          <a:xfrm>
+            <a:off x="685800" y="4343400"/>
+            <a:ext cx="5486400" cy="4114800"/>
+          </a:xfrm>
+          <a:prstGeom prst="rect">
+            <a:avLst/>
+          </a:prstGeom>
+          <a:noFill/>
+          <a:ln>
+            <a:noFill/>
+          </a:ln>
+        </p:spPr>
+        <p:txBody>
+          <a:bodyPr spcFirstLastPara="1" wrap="square" lIns="91425" tIns="91425" rIns="91425" bIns="91425" anchor="ctr" anchorCtr="0">
+            <a:noAutofit/>
+          </a:bodyPr>
+          <a:lstStyle/>
+          <a:p>
+            <a:pPr marL="0" lvl="0" indent="0" algn="l" rtl="0">
+              <a:spcBef>
+                <a:spcPts val="0"/>
+              </a:spcBef>
+              <a:spcAft>
+                <a:spcPts val="0"/>
+              </a:spcAft>
+              <a:buNone/>
+            </a:pPr>
+            <a:endParaRPr/>
+          </a:p>
+        </p:txBody>
+      </p:sp>
+      <p:sp>
+        <p:nvSpPr>
+          <p:cNvPr id="170" name="Google Shape;170;g3f1fc49350a_0_311:notes"/>
+          <p:cNvSpPr>
+            <a:spLocks noGrp="1" noRot="1" noChangeAspect="1"/>
+          </p:cNvSpPr>
+          <p:nvPr>
+            <p:ph type="sldImg" idx="2"/>
+          </p:nvPr>
+        </p:nvSpPr>
+        <p:spPr>
+          <a:xfrm>
+            <a:off x="381000" y="685800"/>
+            <a:ext cx="6096000" cy="3429000"/>
+          </a:xfrm>
+          <a:custGeom>
+            <a:avLst/>
+            <a:gdLst/>
+            <a:ahLst/>
+            <a:cxnLst/>
+            <a:rect l="l" t="t" r="r" b="b"/>
+            <a:pathLst>
+              <a:path w="120000" h="120000" extrusionOk="0">
+                <a:moveTo>
+                  <a:pt x="0" y="0"/>
+                </a:moveTo>
+                <a:lnTo>
+                  <a:pt x="120000" y="0"/>
+                </a:lnTo>
+                <a:lnTo>
+                  <a:pt x="120000" y="120000"/>
+                </a:lnTo>
+                <a:lnTo>
+                  <a:pt x="0" y="120000"/>
+                </a:lnTo>
+                <a:close/>
+              </a:path>
+            </a:pathLst>
+          </a:custGeom>
+        </p:spPr>
+      </p:sp>
+    </p:spTree>
+  </p:cSld>
+  <p:clrMapOvr>
+    <a:masterClrMapping/>
+  </p:clrMapOvr>
+</p:notes>
+</file>
+
+<file path=ppt/notesSlides/notesSlide5.xml><?xml version="1.0" encoding="utf-8"?>
+<p:notes xmlns:a="http://schemas.openxmlformats.org/drawingml/2006/main" xmlns:r="http://schemas.openxmlformats.org/officeDocument/2006/relationships" xmlns:p="http://schemas.openxmlformats.org/presentationml/2006/main" showMasterSp="0" showMasterPhAnim="0">
+  <p:cSld>
+    <p:spTree>
+      <p:nvGrpSpPr>
         <p:cNvPr id="1" name="Shape 143"/>
         <p:cNvGrpSpPr/>
         <p:nvPr/>
@@ -1148,7 +1365,7 @@
 </p:notes>
 </file>
 
-<file path=ppt/notesSlides/notesSlide4.xml><?xml version="1.0" encoding="utf-8"?>
+<file path=ppt/notesSlides/notesSlide6.xml><?xml version="1.0" encoding="utf-8"?>
 <p:notes xmlns:a="http://schemas.openxmlformats.org/drawingml/2006/main" xmlns:r="http://schemas.openxmlformats.org/officeDocument/2006/relationships" xmlns:p="http://schemas.openxmlformats.org/presentationml/2006/main" showMasterSp="0" showMasterPhAnim="0">
   <p:cSld>
     <p:spTree>
@@ -1252,7 +1469,7 @@
 </p:notes>
 </file>
 
-<file path=ppt/notesSlides/notesSlide5.xml><?xml version="1.0" encoding="utf-8"?>
+<file path=ppt/notesSlides/notesSlide7.xml><?xml version="1.0" encoding="utf-8"?>
 <p:notes xmlns:a="http://schemas.openxmlformats.org/drawingml/2006/main" xmlns:r="http://schemas.openxmlformats.org/officeDocument/2006/relationships" xmlns:p="http://schemas.openxmlformats.org/presentationml/2006/main" showMasterSp="0" showMasterPhAnim="0">
   <p:cSld>
     <p:spTree>
@@ -1281,7 +1498,7 @@
         </p:nvSpPr>
         <p:spPr>
           <a:xfrm>
-            <a:off x="381300" y="685800"/>
+            <a:off x="381000" y="685800"/>
             <a:ext cx="6096000" cy="3429000"/>
           </a:xfrm>
           <a:custGeom>
@@ -1347,222 +1564,6 @@
             <a:endParaRPr/>
           </a:p>
         </p:txBody>
-      </p:sp>
-    </p:spTree>
-  </p:cSld>
-  <p:clrMapOvr>
-    <a:masterClrMapping/>
-  </p:clrMapOvr>
-</p:notes>
-</file>
-
-<file path=ppt/notesSlides/notesSlide6.xml><?xml version="1.0" encoding="utf-8"?>
-<p:notes xmlns:a="http://schemas.openxmlformats.org/drawingml/2006/main" xmlns:r="http://schemas.openxmlformats.org/officeDocument/2006/relationships" xmlns:p="http://schemas.openxmlformats.org/presentationml/2006/main" showMasterSp="0" showMasterPhAnim="0">
-  <p:cSld>
-    <p:spTree>
-      <p:nvGrpSpPr>
-        <p:cNvPr id="1" name="Shape 161"/>
-        <p:cNvGrpSpPr/>
-        <p:nvPr/>
-      </p:nvGrpSpPr>
-      <p:grpSpPr>
-        <a:xfrm>
-          <a:off x="0" y="0"/>
-          <a:ext cx="0" cy="0"/>
-          <a:chOff x="0" y="0"/>
-          <a:chExt cx="0" cy="0"/>
-        </a:xfrm>
-      </p:grpSpPr>
-      <p:sp>
-        <p:nvSpPr>
-          <p:cNvPr id="162" name="Google Shape;162;g3f1fc49350a_0_20:notes"/>
-          <p:cNvSpPr txBox="1">
-            <a:spLocks noGrp="1"/>
-          </p:cNvSpPr>
-          <p:nvPr>
-            <p:ph type="body" idx="1"/>
-          </p:nvPr>
-        </p:nvSpPr>
-        <p:spPr>
-          <a:xfrm>
-            <a:off x="685800" y="4343400"/>
-            <a:ext cx="5486400" cy="4114800"/>
-          </a:xfrm>
-          <a:prstGeom prst="rect">
-            <a:avLst/>
-          </a:prstGeom>
-          <a:noFill/>
-          <a:ln>
-            <a:noFill/>
-          </a:ln>
-        </p:spPr>
-        <p:txBody>
-          <a:bodyPr spcFirstLastPara="1" wrap="square" lIns="91425" tIns="91425" rIns="91425" bIns="91425" anchor="ctr" anchorCtr="0">
-            <a:noAutofit/>
-          </a:bodyPr>
-          <a:lstStyle/>
-          <a:p>
-            <a:pPr marL="0" lvl="0" indent="0" algn="l" rtl="0">
-              <a:spcBef>
-                <a:spcPts val="0"/>
-              </a:spcBef>
-              <a:spcAft>
-                <a:spcPts val="0"/>
-              </a:spcAft>
-              <a:buNone/>
-            </a:pPr>
-            <a:endParaRPr/>
-          </a:p>
-        </p:txBody>
-      </p:sp>
-      <p:sp>
-        <p:nvSpPr>
-          <p:cNvPr id="163" name="Google Shape;163;g3f1fc49350a_0_20:notes"/>
-          <p:cNvSpPr>
-            <a:spLocks noGrp="1" noRot="1" noChangeAspect="1"/>
-          </p:cNvSpPr>
-          <p:nvPr>
-            <p:ph type="sldImg" idx="2"/>
-          </p:nvPr>
-        </p:nvSpPr>
-        <p:spPr>
-          <a:xfrm>
-            <a:off x="381000" y="685800"/>
-            <a:ext cx="6096000" cy="3429000"/>
-          </a:xfrm>
-          <a:custGeom>
-            <a:avLst/>
-            <a:gdLst/>
-            <a:ahLst/>
-            <a:cxnLst/>
-            <a:rect l="l" t="t" r="r" b="b"/>
-            <a:pathLst>
-              <a:path w="120000" h="120000" extrusionOk="0">
-                <a:moveTo>
-                  <a:pt x="0" y="0"/>
-                </a:moveTo>
-                <a:lnTo>
-                  <a:pt x="120000" y="0"/>
-                </a:lnTo>
-                <a:lnTo>
-                  <a:pt x="120000" y="120000"/>
-                </a:lnTo>
-                <a:lnTo>
-                  <a:pt x="0" y="120000"/>
-                </a:lnTo>
-                <a:close/>
-              </a:path>
-            </a:pathLst>
-          </a:custGeom>
-        </p:spPr>
-      </p:sp>
-    </p:spTree>
-  </p:cSld>
-  <p:clrMapOvr>
-    <a:masterClrMapping/>
-  </p:clrMapOvr>
-</p:notes>
-</file>
-
-<file path=ppt/notesSlides/notesSlide7.xml><?xml version="1.0" encoding="utf-8"?>
-<p:notes xmlns:a="http://schemas.openxmlformats.org/drawingml/2006/main" xmlns:r="http://schemas.openxmlformats.org/officeDocument/2006/relationships" xmlns:p="http://schemas.openxmlformats.org/presentationml/2006/main" showMasterSp="0" showMasterPhAnim="0">
-  <p:cSld>
-    <p:spTree>
-      <p:nvGrpSpPr>
-        <p:cNvPr id="1" name="Shape 168"/>
-        <p:cNvGrpSpPr/>
-        <p:nvPr/>
-      </p:nvGrpSpPr>
-      <p:grpSpPr>
-        <a:xfrm>
-          <a:off x="0" y="0"/>
-          <a:ext cx="0" cy="0"/>
-          <a:chOff x="0" y="0"/>
-          <a:chExt cx="0" cy="0"/>
-        </a:xfrm>
-      </p:grpSpPr>
-      <p:sp>
-        <p:nvSpPr>
-          <p:cNvPr id="169" name="Google Shape;169;g3f1fc49350a_0_311:notes"/>
-          <p:cNvSpPr txBox="1">
-            <a:spLocks noGrp="1"/>
-          </p:cNvSpPr>
-          <p:nvPr>
-            <p:ph type="body" idx="1"/>
-          </p:nvPr>
-        </p:nvSpPr>
-        <p:spPr>
-          <a:xfrm>
-            <a:off x="685800" y="4343400"/>
-            <a:ext cx="5486400" cy="4114800"/>
-          </a:xfrm>
-          <a:prstGeom prst="rect">
-            <a:avLst/>
-          </a:prstGeom>
-          <a:noFill/>
-          <a:ln>
-            <a:noFill/>
-          </a:ln>
-        </p:spPr>
-        <p:txBody>
-          <a:bodyPr spcFirstLastPara="1" wrap="square" lIns="91425" tIns="91425" rIns="91425" bIns="91425" anchor="ctr" anchorCtr="0">
-            <a:noAutofit/>
-          </a:bodyPr>
-          <a:lstStyle/>
-          <a:p>
-            <a:pPr marL="0" lvl="0" indent="0" algn="l" rtl="0">
-              <a:spcBef>
-                <a:spcPts val="0"/>
-              </a:spcBef>
-              <a:spcAft>
-                <a:spcPts val="0"/>
-              </a:spcAft>
-              <a:buNone/>
-            </a:pPr>
-            <a:endParaRPr/>
-          </a:p>
-        </p:txBody>
-      </p:sp>
-      <p:sp>
-        <p:nvSpPr>
-          <p:cNvPr id="170" name="Google Shape;170;g3f1fc49350a_0_311:notes"/>
-          <p:cNvSpPr>
-            <a:spLocks noGrp="1" noRot="1" noChangeAspect="1"/>
-          </p:cNvSpPr>
-          <p:nvPr>
-            <p:ph type="sldImg" idx="2"/>
-          </p:nvPr>
-        </p:nvSpPr>
-        <p:spPr>
-          <a:xfrm>
-            <a:off x="1143225" y="685800"/>
-            <a:ext cx="4572300" cy="3429000"/>
-          </a:xfrm>
-          <a:custGeom>
-            <a:avLst/>
-            <a:gdLst/>
-            <a:ahLst/>
-            <a:cxnLst/>
-            <a:rect l="l" t="t" r="r" b="b"/>
-            <a:pathLst>
-              <a:path w="120000" h="120000" extrusionOk="0">
-                <a:moveTo>
-                  <a:pt x="0" y="0"/>
-                </a:moveTo>
-                <a:lnTo>
-                  <a:pt x="120000" y="0"/>
-                </a:lnTo>
-                <a:lnTo>
-                  <a:pt x="120000" y="120000"/>
-                </a:lnTo>
-                <a:lnTo>
-                  <a:pt x="0" y="120000"/>
-                </a:lnTo>
-                <a:close/>
-              </a:path>
-            </a:pathLst>
-          </a:custGeom>
-        </p:spPr>
       </p:sp>
     </p:spTree>
   </p:cSld>
@@ -21555,6 +21556,101 @@
   <p:cSld>
     <p:spTree>
       <p:nvGrpSpPr>
+        <p:cNvPr id="1" name="Shape 195"/>
+        <p:cNvGrpSpPr/>
+        <p:nvPr/>
+      </p:nvGrpSpPr>
+      <p:grpSpPr>
+        <a:xfrm>
+          <a:off x="0" y="0"/>
+          <a:ext cx="0" cy="0"/>
+          <a:chOff x="0" y="0"/>
+          <a:chExt cx="0" cy="0"/>
+        </a:xfrm>
+      </p:grpSpPr>
+      <p:sp>
+        <p:nvSpPr>
+          <p:cNvPr id="196" name="Google Shape;196;p34"/>
+          <p:cNvSpPr txBox="1">
+            <a:spLocks noGrp="1"/>
+          </p:cNvSpPr>
+          <p:nvPr>
+            <p:ph type="title"/>
+          </p:nvPr>
+        </p:nvSpPr>
+        <p:spPr>
+          <a:xfrm>
+            <a:off x="457200" y="70643"/>
+            <a:ext cx="8229600" cy="857400"/>
+          </a:xfrm>
+          <a:prstGeom prst="rect">
+            <a:avLst/>
+          </a:prstGeom>
+        </p:spPr>
+        <p:txBody>
+          <a:bodyPr spcFirstLastPara="1" wrap="square" lIns="91425" tIns="91425" rIns="91425" bIns="91425" anchor="ctr" anchorCtr="0">
+            <a:noAutofit/>
+          </a:bodyPr>
+          <a:lstStyle/>
+          <a:p>
+            <a:pPr marL="0" lvl="0" indent="0" algn="ctr" rtl="0">
+              <a:spcBef>
+                <a:spcPts val="0"/>
+              </a:spcBef>
+              <a:spcAft>
+                <a:spcPts val="0"/>
+              </a:spcAft>
+              <a:buNone/>
+            </a:pPr>
+            <a:r>
+              <a:rPr lang="en"/>
+              <a:t>Training an RNN</a:t>
+            </a:r>
+            <a:endParaRPr/>
+          </a:p>
+        </p:txBody>
+      </p:sp>
+      <p:pic>
+        <p:nvPicPr>
+          <p:cNvPr id="197" name="Google Shape;197;p34"/>
+          <p:cNvPicPr preferRelativeResize="0"/>
+          <p:nvPr/>
+        </p:nvPicPr>
+        <p:blipFill>
+          <a:blip r:embed="rId3">
+            <a:alphaModFix/>
+          </a:blip>
+          <a:stretch>
+            <a:fillRect/>
+          </a:stretch>
+        </p:blipFill>
+        <p:spPr>
+          <a:xfrm>
+            <a:off x="448788" y="1033358"/>
+            <a:ext cx="8246435" cy="3775321"/>
+          </a:xfrm>
+          <a:prstGeom prst="rect">
+            <a:avLst/>
+          </a:prstGeom>
+          <a:noFill/>
+          <a:ln>
+            <a:noFill/>
+          </a:ln>
+        </p:spPr>
+      </p:pic>
+    </p:spTree>
+  </p:cSld>
+  <p:clrMapOvr>
+    <a:masterClrMapping/>
+  </p:clrMapOvr>
+</p:sld>
+</file>
+
+<file path=ppt/slides/slide11.xml><?xml version="1.0" encoding="utf-8"?>
+<p:sld xmlns:a="http://schemas.openxmlformats.org/drawingml/2006/main" xmlns:r="http://schemas.openxmlformats.org/officeDocument/2006/relationships" xmlns:p="http://schemas.openxmlformats.org/presentationml/2006/main">
+  <p:cSld>
+    <p:spTree>
+      <p:nvGrpSpPr>
         <p:cNvPr id="1" name="Shape 201"/>
         <p:cNvGrpSpPr/>
         <p:nvPr/>
@@ -21634,86 +21730,6 @@
           <a:ln>
             <a:noFill/>
           </a:ln>
-        </p:spPr>
-      </p:pic>
-    </p:spTree>
-  </p:cSld>
-  <p:clrMapOvr>
-    <a:masterClrMapping/>
-  </p:clrMapOvr>
-</p:sld>
-</file>
-
-<file path=ppt/slides/slide11.xml><?xml version="1.0" encoding="utf-8"?>
-<p:sld xmlns:a="http://schemas.openxmlformats.org/drawingml/2006/main" xmlns:r="http://schemas.openxmlformats.org/officeDocument/2006/relationships" xmlns:p="http://schemas.openxmlformats.org/presentationml/2006/main">
-  <p:cSld>
-    <p:spTree>
-      <p:nvGrpSpPr>
-        <p:cNvPr id="1" name=""/>
-        <p:cNvGrpSpPr/>
-        <p:nvPr/>
-      </p:nvGrpSpPr>
-      <p:grpSpPr>
-        <a:xfrm>
-          <a:off x="0" y="0"/>
-          <a:ext cx="0" cy="0"/>
-          <a:chOff x="0" y="0"/>
-          <a:chExt cx="0" cy="0"/>
-        </a:xfrm>
-      </p:grpSpPr>
-      <p:sp>
-        <p:nvSpPr>
-          <p:cNvPr id="2" name="TextBox 1"/>
-          <p:cNvSpPr txBox="1"/>
-          <p:nvPr/>
-        </p:nvSpPr>
-        <p:spPr>
-          <a:xfrm>
-            <a:off x="182880" y="154305"/>
-            <a:ext cx="8778240" cy="617220"/>
-          </a:xfrm>
-          <a:prstGeom prst="rect">
-            <a:avLst/>
-          </a:prstGeom>
-          <a:noFill/>
-        </p:spPr>
-        <p:txBody>
-          <a:bodyPr wrap="square">
-            <a:spAutoFit/>
-          </a:bodyPr>
-          <a:lstStyle/>
-          <a:p>
-            <a:pPr>
-              <a:defRPr sz="1800" b="1"/>
-            </a:pPr>
-            <a:r>
-              <a:t>Minimal DFAs for three small vocabularies</a:t>
-            </a:r>
-          </a:p>
-        </p:txBody>
-      </p:sp>
-      <p:pic>
-        <p:nvPicPr>
-          <p:cNvPr id="3" name="Picture 2" descr="fig_dfa_examples.jpg"/>
-          <p:cNvPicPr>
-            <a:picLocks noChangeAspect="1"/>
-          </p:cNvPicPr>
-          <p:nvPr/>
-        </p:nvPicPr>
-        <p:blipFill>
-          <a:blip r:embed="rId2"/>
-          <a:stretch>
-            <a:fillRect/>
-          </a:stretch>
-        </p:blipFill>
-        <p:spPr>
-          <a:xfrm>
-            <a:off x="247188" y="822960"/>
-            <a:ext cx="8649622" cy="4166235"/>
-          </a:xfrm>
-          <a:prstGeom prst="rect">
-            <a:avLst/>
-          </a:prstGeom>
         </p:spPr>
       </p:pic>
     </p:spTree>
@@ -21767,14 +21783,14 @@
               <a:defRPr sz="1800" b="1"/>
             </a:pPr>
             <a:r>
-              <a:t>Demo vocabulary and training stream</a:t>
+              <a:t>Minimal DFAs for three small vocabularies</a:t>
             </a:r>
           </a:p>
         </p:txBody>
       </p:sp>
       <p:pic>
         <p:nvPicPr>
-          <p:cNvPr id="3" name="Picture 2" descr="fig04_corpus_stream.jpg"/>
+          <p:cNvPr id="3" name="Picture 2" descr="fig_dfa_examples.jpg"/>
           <p:cNvPicPr>
             <a:picLocks noChangeAspect="1"/>
           </p:cNvPicPr>
@@ -21788,8 +21804,8 @@
         </p:blipFill>
         <p:spPr>
           <a:xfrm>
-            <a:off x="182880" y="1497901"/>
-            <a:ext cx="8778240" cy="2816352"/>
+            <a:off x="247188" y="822960"/>
+            <a:ext cx="8649622" cy="4166235"/>
           </a:xfrm>
           <a:prstGeom prst="rect">
             <a:avLst/>
@@ -21847,14 +21863,14 @@
               <a:defRPr sz="1800" b="1"/>
             </a:pPr>
             <a:r>
-              <a:t>Learning curve and generation</a:t>
+              <a:t>Demo vocabulary and training stream</a:t>
             </a:r>
           </a:p>
         </p:txBody>
       </p:sp>
       <p:pic>
         <p:nvPicPr>
-          <p:cNvPr id="3" name="Picture 2" descr="fig03_learning_with_samples.jpg"/>
+          <p:cNvPr id="3" name="Picture 2" descr="fig04_corpus_stream.jpg"/>
           <p:cNvPicPr>
             <a:picLocks noChangeAspect="1"/>
           </p:cNvPicPr>
@@ -21868,8 +21884,8 @@
         </p:blipFill>
         <p:spPr>
           <a:xfrm>
-            <a:off x="182880" y="1584952"/>
-            <a:ext cx="8778240" cy="2642250"/>
+            <a:off x="182880" y="1497901"/>
+            <a:ext cx="8778240" cy="2816352"/>
           </a:xfrm>
           <a:prstGeom prst="rect">
             <a:avLst/>
@@ -21927,14 +21943,14 @@
               <a:defRPr sz="1800" b="1"/>
             </a:pPr>
             <a:r>
-              <a:t>Next-character probabilities</a:t>
+              <a:t>Learning curve and generation</a:t>
             </a:r>
           </a:p>
         </p:txBody>
       </p:sp>
       <p:pic>
         <p:nvPicPr>
-          <p:cNvPr id="3" name="Picture 2" descr="fig_next_char_probs.jpg"/>
+          <p:cNvPr id="3" name="Picture 2" descr="fig03_learning_with_samples.jpg"/>
           <p:cNvPicPr>
             <a:picLocks noChangeAspect="1"/>
           </p:cNvPicPr>
@@ -21948,8 +21964,8 @@
         </p:blipFill>
         <p:spPr>
           <a:xfrm>
-            <a:off x="286379" y="822960"/>
-            <a:ext cx="8571240" cy="4166234"/>
+            <a:off x="182880" y="1584952"/>
+            <a:ext cx="8778240" cy="2642250"/>
           </a:xfrm>
           <a:prstGeom prst="rect">
             <a:avLst/>
@@ -22007,14 +22023,14 @@
               <a:defRPr sz="1800" b="1"/>
             </a:pPr>
             <a:r>
-              <a:t>Activation heatmap</a:t>
+              <a:t>Next-character probabilities</a:t>
             </a:r>
           </a:p>
         </p:txBody>
       </p:sp>
       <p:pic>
         <p:nvPicPr>
-          <p:cNvPr id="3" name="Picture 2" descr="fig_activation_heatmap.jpg"/>
+          <p:cNvPr id="3" name="Picture 2" descr="fig_next_char_probs.jpg"/>
           <p:cNvPicPr>
             <a:picLocks noChangeAspect="1"/>
           </p:cNvPicPr>
@@ -22028,8 +22044,8 @@
         </p:blipFill>
         <p:spPr>
           <a:xfrm>
-            <a:off x="1485900" y="822960"/>
-            <a:ext cx="6172200" cy="4166235"/>
+            <a:off x="286379" y="822960"/>
+            <a:ext cx="8571240" cy="4166234"/>
           </a:xfrm>
           <a:prstGeom prst="rect">
             <a:avLst/>
@@ -22087,14 +22103,14 @@
               <a:defRPr sz="1800" b="1"/>
             </a:pPr>
             <a:r>
-              <a:t>Activations clustered by prefix</a:t>
+              <a:t>Activation heatmap</a:t>
             </a:r>
           </a:p>
         </p:txBody>
       </p:sp>
       <p:pic>
         <p:nvPicPr>
-          <p:cNvPr id="3" name="Picture 2" descr="fig_activation_clustered.jpg"/>
+          <p:cNvPr id="3" name="Picture 2" descr="fig_activation_heatmap.jpg"/>
           <p:cNvPicPr>
             <a:picLocks noChangeAspect="1"/>
           </p:cNvPicPr>
@@ -22108,8 +22124,8 @@
         </p:blipFill>
         <p:spPr>
           <a:xfrm>
-            <a:off x="182880" y="1049479"/>
-            <a:ext cx="8778240" cy="3713195"/>
+            <a:off x="1485900" y="822960"/>
+            <a:ext cx="6172200" cy="4166235"/>
           </a:xfrm>
           <a:prstGeom prst="rect">
             <a:avLst/>
@@ -22167,14 +22183,14 @@
               <a:defRPr sz="1800" b="1"/>
             </a:pPr>
             <a:r>
-              <a:t>Hidden-state correlation</a:t>
+              <a:t>Activations clustered by prefix</a:t>
             </a:r>
           </a:p>
         </p:txBody>
       </p:sp>
       <p:pic>
         <p:nvPicPr>
-          <p:cNvPr id="3" name="Picture 2" descr="fig_state_correlation.jpg"/>
+          <p:cNvPr id="3" name="Picture 2" descr="fig_activation_clustered.jpg"/>
           <p:cNvPicPr>
             <a:picLocks noChangeAspect="1"/>
           </p:cNvPicPr>
@@ -22188,8 +22204,8 @@
         </p:blipFill>
         <p:spPr>
           <a:xfrm>
-            <a:off x="1831055" y="822960"/>
-            <a:ext cx="5481888" cy="4166235"/>
+            <a:off x="182880" y="1049479"/>
+            <a:ext cx="8778240" cy="3713195"/>
           </a:xfrm>
           <a:prstGeom prst="rect">
             <a:avLst/>
@@ -22247,14 +22263,14 @@
               <a:defRPr sz="1800" b="1"/>
             </a:pPr>
             <a:r>
-              <a:t>DFA PCA geometry and feature separation</a:t>
+              <a:t>Hidden-state correlation</a:t>
             </a:r>
           </a:p>
         </p:txBody>
       </p:sp>
       <p:pic>
         <p:nvPicPr>
-          <p:cNvPr id="3" name="Picture 2" descr="fig_dfa_pca_geometry.jpg"/>
+          <p:cNvPr id="3" name="Picture 2" descr="fig_state_correlation.jpg"/>
           <p:cNvPicPr>
             <a:picLocks noChangeAspect="1"/>
           </p:cNvPicPr>
@@ -22268,8 +22284,8 @@
         </p:blipFill>
         <p:spPr>
           <a:xfrm>
-            <a:off x="2417050" y="822960"/>
-            <a:ext cx="4309898" cy="4166235"/>
+            <a:off x="1831055" y="822960"/>
+            <a:ext cx="5481888" cy="4166235"/>
           </a:xfrm>
           <a:prstGeom prst="rect">
             <a:avLst/>
@@ -22327,14 +22343,14 @@
               <a:defRPr sz="1800" b="1"/>
             </a:pPr>
             <a:r>
-              <a:t>Example selective units</a:t>
+              <a:t>DFA PCA geometry and feature separation</a:t>
             </a:r>
           </a:p>
         </p:txBody>
       </p:sp>
       <p:pic>
         <p:nvPicPr>
-          <p:cNvPr id="3" name="Picture 2" descr="fig_example_units.jpg"/>
+          <p:cNvPr id="3" name="Picture 2" descr="fig_dfa_pca_geometry.jpg"/>
           <p:cNvPicPr>
             <a:picLocks noChangeAspect="1"/>
           </p:cNvPicPr>
@@ -22348,8 +22364,8 @@
         </p:blipFill>
         <p:spPr>
           <a:xfrm>
-            <a:off x="1499555" y="822960"/>
-            <a:ext cx="6144889" cy="4166235"/>
+            <a:off x="2417050" y="822960"/>
+            <a:ext cx="4309898" cy="4166235"/>
           </a:xfrm>
           <a:prstGeom prst="rect">
             <a:avLst/>
@@ -22526,14 +22542,14 @@
               <a:defRPr sz="1800" b="1"/>
             </a:pPr>
             <a:r>
-              <a:t>Linear decoding with word identity</a:t>
+              <a:t>Example selective units</a:t>
             </a:r>
           </a:p>
         </p:txBody>
       </p:sp>
       <p:pic>
         <p:nvPicPr>
-          <p:cNvPr id="3" name="Picture 2" descr="fig_decoding_with_word.jpg"/>
+          <p:cNvPr id="3" name="Picture 2" descr="fig_example_units.jpg"/>
           <p:cNvPicPr>
             <a:picLocks noChangeAspect="1"/>
           </p:cNvPicPr>
@@ -22547,8 +22563,8 @@
         </p:blipFill>
         <p:spPr>
           <a:xfrm>
-            <a:off x="182880" y="1655178"/>
-            <a:ext cx="8778240" cy="2501798"/>
+            <a:off x="1499555" y="822960"/>
+            <a:ext cx="6144889" cy="4166235"/>
           </a:xfrm>
           <a:prstGeom prst="rect">
             <a:avLst/>
@@ -22606,14 +22622,14 @@
               <a:defRPr sz="1800" b="1"/>
             </a:pPr>
             <a:r>
-              <a:t>DFA states and trajectories across seeds</a:t>
+              <a:t>Linear decoding with word identity</a:t>
             </a:r>
           </a:p>
         </p:txBody>
       </p:sp>
       <p:pic>
         <p:nvPicPr>
-          <p:cNvPr id="3" name="Picture 2" descr="fig_word_trajectories.jpg"/>
+          <p:cNvPr id="3" name="Picture 2" descr="fig_decoding_with_word.jpg"/>
           <p:cNvPicPr>
             <a:picLocks noChangeAspect="1"/>
           </p:cNvPicPr>
@@ -22627,8 +22643,8 @@
         </p:blipFill>
         <p:spPr>
           <a:xfrm>
-            <a:off x="182880" y="1002296"/>
-            <a:ext cx="8778240" cy="3807561"/>
+            <a:off x="182880" y="1655178"/>
+            <a:ext cx="8778240" cy="2501798"/>
           </a:xfrm>
           <a:prstGeom prst="rect">
             <a:avLst/>
@@ -22686,14 +22702,14 @@
               <a:defRPr sz="1800" b="1"/>
             </a:pPr>
             <a:r>
-              <a:t>Mixed-vocab scaling overview</a:t>
+              <a:t>DFA states and trajectories across seeds</a:t>
             </a:r>
           </a:p>
         </p:txBody>
       </p:sp>
       <p:pic>
         <p:nvPicPr>
-          <p:cNvPr id="3" name="Picture 2" descr="fig_mixed_scaling_overview.jpg"/>
+          <p:cNvPr id="3" name="Picture 2" descr="fig_word_trajectories.jpg"/>
           <p:cNvPicPr>
             <a:picLocks noChangeAspect="1"/>
           </p:cNvPicPr>
@@ -22707,8 +22723,8 @@
         </p:blipFill>
         <p:spPr>
           <a:xfrm>
-            <a:off x="182880" y="1401236"/>
-            <a:ext cx="8778240" cy="3009682"/>
+            <a:off x="182880" y="1002296"/>
+            <a:ext cx="8778240" cy="3807561"/>
           </a:xfrm>
           <a:prstGeom prst="rect">
             <a:avLst/>
@@ -22766,14 +22782,14 @@
               <a:defRPr sz="1800" b="1"/>
             </a:pPr>
             <a:r>
-              <a:t>Activation heatmaps across DFA size</a:t>
+              <a:t>Mixed-vocab scaling overview</a:t>
             </a:r>
           </a:p>
         </p:txBody>
       </p:sp>
       <p:pic>
         <p:nvPicPr>
-          <p:cNvPr id="3" name="Picture 2" descr="fig_activation_heatmaps_by_dfa.jpg"/>
+          <p:cNvPr id="3" name="Picture 2" descr="fig_mixed_scaling_overview.jpg"/>
           <p:cNvPicPr>
             <a:picLocks noChangeAspect="1"/>
           </p:cNvPicPr>
@@ -22787,8 +22803,8 @@
         </p:blipFill>
         <p:spPr>
           <a:xfrm>
-            <a:off x="1521409" y="822960"/>
-            <a:ext cx="6101180" cy="4166235"/>
+            <a:off x="182880" y="1401236"/>
+            <a:ext cx="8778240" cy="3009682"/>
           </a:xfrm>
           <a:prstGeom prst="rect">
             <a:avLst/>
@@ -22846,14 +22862,14 @@
               <a:defRPr sz="1800" b="1"/>
             </a:pPr>
             <a:r>
-              <a:t>Closed-loop trajectories by DFA span</a:t>
+              <a:t>Activation heatmaps across DFA size</a:t>
             </a:r>
           </a:p>
         </p:txBody>
       </p:sp>
       <p:pic>
         <p:nvPicPr>
-          <p:cNvPr id="3" name="Picture 2" descr="fig_mixed_traj_by_dfa.jpg"/>
+          <p:cNvPr id="3" name="Picture 2" descr="fig_activation_heatmaps_by_dfa.jpg"/>
           <p:cNvPicPr>
             <a:picLocks noChangeAspect="1"/>
           </p:cNvPicPr>
@@ -22867,8 +22883,8 @@
         </p:blipFill>
         <p:spPr>
           <a:xfrm>
-            <a:off x="2528186" y="822960"/>
-            <a:ext cx="4087626" cy="4166235"/>
+            <a:off x="1521409" y="822960"/>
+            <a:ext cx="6101180" cy="4166235"/>
           </a:xfrm>
           <a:prstGeom prst="rect">
             <a:avLst/>
@@ -22926,14 +22942,14 @@
               <a:defRPr sz="1800" b="1"/>
             </a:pPr>
             <a:r>
-              <a:t>Readout curves and learning</a:t>
+              <a:t>Closed-loop trajectories by DFA span</a:t>
             </a:r>
           </a:p>
         </p:txBody>
       </p:sp>
       <p:pic>
         <p:nvPicPr>
-          <p:cNvPr id="3" name="Picture 2" descr="fig_mixed_decoding_curves.jpg"/>
+          <p:cNvPr id="3" name="Picture 2" descr="fig_mixed_traj_by_dfa.jpg"/>
           <p:cNvPicPr>
             <a:picLocks noChangeAspect="1"/>
           </p:cNvPicPr>
@@ -22947,8 +22963,8 @@
         </p:blipFill>
         <p:spPr>
           <a:xfrm>
-            <a:off x="2511410" y="822960"/>
-            <a:ext cx="4121178" cy="4166235"/>
+            <a:off x="2528186" y="822960"/>
+            <a:ext cx="4087626" cy="4166235"/>
           </a:xfrm>
           <a:prstGeom prst="rect">
             <a:avLst/>
@@ -23006,14 +23022,14 @@
               <a:defRPr sz="1800" b="1"/>
             </a:pPr>
             <a:r>
-              <a:t>Within-feature geometry and unit selectivity</a:t>
+              <a:t>Readout curves and learning</a:t>
             </a:r>
           </a:p>
         </p:txBody>
       </p:sp>
       <p:pic>
         <p:nvPicPr>
-          <p:cNvPr id="3" name="Picture 2" descr="fig_mixed_cosine_within.jpg"/>
+          <p:cNvPr id="3" name="Picture 2" descr="fig_mixed_decoding_curves.jpg"/>
           <p:cNvPicPr>
             <a:picLocks noChangeAspect="1"/>
           </p:cNvPicPr>
@@ -23027,8 +23043,8 @@
         </p:blipFill>
         <p:spPr>
           <a:xfrm>
-            <a:off x="467334" y="822960"/>
-            <a:ext cx="8209330" cy="4166235"/>
+            <a:off x="2511410" y="822960"/>
+            <a:ext cx="4121178" cy="4166235"/>
           </a:xfrm>
           <a:prstGeom prst="rect">
             <a:avLst/>
@@ -23086,14 +23102,14 @@
               <a:defRPr sz="1800" b="1"/>
             </a:pPr>
             <a:r>
-              <a:t>Readout vs DFA at fixed PCs</a:t>
+              <a:t>Within-feature geometry and unit selectivity</a:t>
             </a:r>
           </a:p>
         </p:txBody>
       </p:sp>
       <p:pic>
         <p:nvPicPr>
-          <p:cNvPr id="3" name="Picture 2" descr="fig_mixed_decoding_vs_dfa.jpg"/>
+          <p:cNvPr id="3" name="Picture 2" descr="fig_mixed_cosine_within.jpg"/>
           <p:cNvPicPr>
             <a:picLocks noChangeAspect="1"/>
           </p:cNvPicPr>
@@ -23107,8 +23123,8 @@
         </p:blipFill>
         <p:spPr>
           <a:xfrm>
-            <a:off x="533646" y="822960"/>
-            <a:ext cx="8076707" cy="4166235"/>
+            <a:off x="467334" y="822960"/>
+            <a:ext cx="8209330" cy="4166235"/>
           </a:xfrm>
           <a:prstGeom prst="rect">
             <a:avLst/>
@@ -23166,14 +23182,14 @@
               <a:defRPr sz="1800" b="1"/>
             </a:pPr>
             <a:r>
-              <a:t>Weight matrices by DFA size</a:t>
+              <a:t>Readout vs DFA at fixed PCs</a:t>
             </a:r>
           </a:p>
         </p:txBody>
       </p:sp>
       <p:pic>
         <p:nvPicPr>
-          <p:cNvPr id="3" name="Picture 2" descr="fig_weight_matrices_by_dfa.jpg"/>
+          <p:cNvPr id="3" name="Picture 2" descr="fig_mixed_decoding_vs_dfa.jpg"/>
           <p:cNvPicPr>
             <a:picLocks noChangeAspect="1"/>
           </p:cNvPicPr>
@@ -23187,8 +23203,8 @@
         </p:blipFill>
         <p:spPr>
           <a:xfrm>
-            <a:off x="1436124" y="822960"/>
-            <a:ext cx="6271751" cy="4166234"/>
+            <a:off x="533646" y="822960"/>
+            <a:ext cx="8076707" cy="4166235"/>
           </a:xfrm>
           <a:prstGeom prst="rect">
             <a:avLst/>
@@ -23246,14 +23262,14 @@
               <a:defRPr sz="1800" b="1"/>
             </a:pPr>
             <a:r>
-              <a:t>Weight graph structure and motifs vs DFA</a:t>
+              <a:t>Weight matrices by DFA size</a:t>
             </a:r>
           </a:p>
         </p:txBody>
       </p:sp>
       <p:pic>
         <p:nvPicPr>
-          <p:cNvPr id="3" name="Picture 2" descr="fig_weight_graph_motifs_vs_dfa.jpg"/>
+          <p:cNvPr id="3" name="Picture 2" descr="fig_weight_matrices_by_dfa.jpg"/>
           <p:cNvPicPr>
             <a:picLocks noChangeAspect="1"/>
           </p:cNvPicPr>
@@ -23267,8 +23283,8 @@
         </p:blipFill>
         <p:spPr>
           <a:xfrm>
-            <a:off x="1388195" y="822960"/>
-            <a:ext cx="6367608" cy="4166235"/>
+            <a:off x="1436124" y="822960"/>
+            <a:ext cx="6271751" cy="4166234"/>
           </a:xfrm>
           <a:prstGeom prst="rect">
             <a:avLst/>
@@ -23284,994 +23300,6 @@
 </file>
 
 <file path=ppt/slides/slide3.xml><?xml version="1.0" encoding="utf-8"?>
-<p:sld xmlns:a="http://schemas.openxmlformats.org/drawingml/2006/main" xmlns:r="http://schemas.openxmlformats.org/officeDocument/2006/relationships" xmlns:p="http://schemas.openxmlformats.org/presentationml/2006/main">
-  <p:cSld>
-    <p:spTree>
-      <p:nvGrpSpPr>
-        <p:cNvPr id="1" name="Shape 146"/>
-        <p:cNvGrpSpPr/>
-        <p:nvPr/>
-      </p:nvGrpSpPr>
-      <p:grpSpPr>
-        <a:xfrm>
-          <a:off x="0" y="0"/>
-          <a:ext cx="0" cy="0"/>
-          <a:chOff x="0" y="0"/>
-          <a:chExt cx="0" cy="0"/>
-        </a:xfrm>
-      </p:grpSpPr>
-      <p:sp>
-        <p:nvSpPr>
-          <p:cNvPr id="147" name="Google Shape;147;p28"/>
-          <p:cNvSpPr txBox="1">
-            <a:spLocks noGrp="1"/>
-          </p:cNvSpPr>
-          <p:nvPr>
-            <p:ph type="title"/>
-          </p:nvPr>
-        </p:nvSpPr>
-        <p:spPr>
-          <a:xfrm>
-            <a:off x="311700" y="445025"/>
-            <a:ext cx="8520600" cy="572700"/>
-          </a:xfrm>
-          <a:prstGeom prst="rect">
-            <a:avLst/>
-          </a:prstGeom>
-        </p:spPr>
-        <p:txBody>
-          <a:bodyPr spcFirstLastPara="1" wrap="square" lIns="91425" tIns="91425" rIns="91425" bIns="91425" anchor="t" anchorCtr="0">
-            <a:normAutofit fontScale="90000"/>
-          </a:bodyPr>
-          <a:lstStyle/>
-          <a:p>
-            <a:pPr marL="0" lvl="0" indent="0" algn="ctr" rtl="0">
-              <a:spcBef>
-                <a:spcPts val="0"/>
-              </a:spcBef>
-              <a:spcAft>
-                <a:spcPts val="0"/>
-              </a:spcAft>
-              <a:buNone/>
-            </a:pPr>
-            <a:r>
-              <a:rPr lang="en"/>
-              <a:t>Assumptions</a:t>
-            </a:r>
-            <a:endParaRPr/>
-          </a:p>
-        </p:txBody>
-      </p:sp>
-      <p:sp>
-        <p:nvSpPr>
-          <p:cNvPr id="148" name="Google Shape;148;p28"/>
-          <p:cNvSpPr txBox="1">
-            <a:spLocks noGrp="1"/>
-          </p:cNvSpPr>
-          <p:nvPr>
-            <p:ph type="body" idx="1"/>
-          </p:nvPr>
-        </p:nvSpPr>
-        <p:spPr>
-          <a:xfrm>
-            <a:off x="311700" y="1152475"/>
-            <a:ext cx="8520600" cy="3416400"/>
-          </a:xfrm>
-          <a:prstGeom prst="rect">
-            <a:avLst/>
-          </a:prstGeom>
-        </p:spPr>
-        <p:txBody>
-          <a:bodyPr spcFirstLastPara="1" wrap="square" lIns="91425" tIns="91425" rIns="91425" bIns="91425" anchor="t" anchorCtr="0">
-            <a:normAutofit fontScale="92500" lnSpcReduction="10000"/>
-          </a:bodyPr>
-          <a:lstStyle/>
-          <a:p>
-            <a:pPr marL="457200" lvl="0" indent="-334328" algn="l" rtl="0">
-              <a:spcBef>
-                <a:spcPts val="0"/>
-              </a:spcBef>
-              <a:spcAft>
-                <a:spcPts val="0"/>
-              </a:spcAft>
-              <a:buSzPct val="100000"/>
-              <a:buAutoNum type="arabicPeriod"/>
-            </a:pPr>
-            <a:r>
-              <a:rPr lang="en"/>
-              <a:t>To a first approximation, the brain is a recurrent neural network.</a:t>
-            </a:r>
-            <a:endParaRPr/>
-          </a:p>
-          <a:p>
-            <a:pPr marL="457200" lvl="0" indent="-334328" algn="l" rtl="0">
-              <a:spcBef>
-                <a:spcPts val="1000"/>
-              </a:spcBef>
-              <a:spcAft>
-                <a:spcPts val="0"/>
-              </a:spcAft>
-              <a:buSzPct val="100000"/>
-              <a:buAutoNum type="arabicPeriod"/>
-            </a:pPr>
-            <a:r>
-              <a:rPr lang="en"/>
-              <a:t>The output of the brain at any given time is a function of the </a:t>
-            </a:r>
-            <a:r>
-              <a:rPr lang="en" i="1"/>
-              <a:t>state </a:t>
-            </a:r>
-            <a:r>
-              <a:rPr lang="en"/>
-              <a:t>of the network at that time; the output of the network over a period of time is a </a:t>
-            </a:r>
-            <a:r>
-              <a:rPr lang="en" i="1"/>
-              <a:t>trajectory</a:t>
-            </a:r>
-            <a:r>
-              <a:rPr lang="en"/>
-              <a:t> through the state space.</a:t>
-            </a:r>
-            <a:endParaRPr/>
-          </a:p>
-          <a:p>
-            <a:pPr marL="457200" lvl="0" indent="-334328" algn="l" rtl="0">
-              <a:spcBef>
-                <a:spcPts val="1000"/>
-              </a:spcBef>
-              <a:spcAft>
-                <a:spcPts val="0"/>
-              </a:spcAft>
-              <a:buSzPct val="100000"/>
-              <a:buAutoNum type="arabicPeriod"/>
-            </a:pPr>
-            <a:r>
-              <a:rPr lang="en"/>
-              <a:t>The brain originally learns sequences without any prior assumptions about sequence structure; all learned structure is emergent from naive next token prediction.</a:t>
-            </a:r>
-            <a:endParaRPr/>
-          </a:p>
-          <a:p>
-            <a:pPr marL="457200" lvl="0" indent="-334328" algn="l" rtl="0">
-              <a:spcBef>
-                <a:spcPts val="1000"/>
-              </a:spcBef>
-              <a:spcAft>
-                <a:spcPts val="0"/>
-              </a:spcAft>
-              <a:buSzPct val="100000"/>
-              <a:buAutoNum type="arabicPeriod"/>
-            </a:pPr>
-            <a:r>
-              <a:rPr lang="en"/>
-              <a:t>Once learned, the brain produces sequences via a closed loop process - it generates (predicts) a token, which is fed as an input to the network at the next time step.</a:t>
-            </a:r>
-            <a:endParaRPr/>
-          </a:p>
-          <a:p>
-            <a:pPr marL="0" lvl="0" indent="0" algn="l" rtl="0">
-              <a:spcBef>
-                <a:spcPts val="1000"/>
-              </a:spcBef>
-              <a:spcAft>
-                <a:spcPts val="1200"/>
-              </a:spcAft>
-              <a:buNone/>
-            </a:pPr>
-            <a:endParaRPr/>
-          </a:p>
-        </p:txBody>
-      </p:sp>
-    </p:spTree>
-  </p:cSld>
-  <p:clrMapOvr>
-    <a:masterClrMapping/>
-  </p:clrMapOvr>
-</p:sld>
-</file>
-
-<file path=ppt/slides/slide30.xml><?xml version="1.0" encoding="utf-8"?>
-<p:sld xmlns:a="http://schemas.openxmlformats.org/drawingml/2006/main" xmlns:r="http://schemas.openxmlformats.org/officeDocument/2006/relationships" xmlns:p="http://schemas.openxmlformats.org/presentationml/2006/main">
-  <p:cSld>
-    <p:spTree>
-      <p:nvGrpSpPr>
-        <p:cNvPr id="1" name=""/>
-        <p:cNvGrpSpPr/>
-        <p:nvPr/>
-      </p:nvGrpSpPr>
-      <p:grpSpPr>
-        <a:xfrm>
-          <a:off x="0" y="0"/>
-          <a:ext cx="0" cy="0"/>
-          <a:chOff x="0" y="0"/>
-          <a:chExt cx="0" cy="0"/>
-        </a:xfrm>
-      </p:grpSpPr>
-      <p:sp>
-        <p:nvSpPr>
-          <p:cNvPr id="2" name="TextBox 1">
-            <a:extLst>
-              <a:ext uri="{FF2B5EF4-FFF2-40B4-BE49-F238E27FC236}">
-                <a16:creationId xmlns:a16="http://schemas.microsoft.com/office/drawing/2014/main" id="{7EFD6A0E-3B42-9041-628C-61847C9DCDA0}"/>
-              </a:ext>
-            </a:extLst>
-          </p:cNvPr>
-          <p:cNvSpPr txBox="1"/>
-          <p:nvPr/>
-        </p:nvSpPr>
-        <p:spPr>
-          <a:xfrm>
-            <a:off x="2903034" y="170985"/>
-            <a:ext cx="3337932" cy="523220"/>
-          </a:xfrm>
-          <a:prstGeom prst="rect">
-            <a:avLst/>
-          </a:prstGeom>
-          <a:noFill/>
-        </p:spPr>
-        <p:txBody>
-          <a:bodyPr wrap="square" rtlCol="0">
-            <a:spAutoFit/>
-          </a:bodyPr>
-          <a:lstStyle/>
-          <a:p>
-            <a:pPr algn="ctr"/>
-            <a:r>
-              <a:rPr lang="en-US" sz="2800" dirty="0"/>
-              <a:t>Conclusions</a:t>
-            </a:r>
-          </a:p>
-        </p:txBody>
-      </p:sp>
-      <p:sp>
-        <p:nvSpPr>
-          <p:cNvPr id="6" name="TextBox 5">
-            <a:extLst>
-              <a:ext uri="{FF2B5EF4-FFF2-40B4-BE49-F238E27FC236}">
-                <a16:creationId xmlns:a16="http://schemas.microsoft.com/office/drawing/2014/main" id="{5A9CE7F4-11BD-A141-B547-B2C73CD3FFC3}"/>
-              </a:ext>
-            </a:extLst>
-          </p:cNvPr>
-          <p:cNvSpPr txBox="1"/>
-          <p:nvPr/>
-        </p:nvSpPr>
-        <p:spPr>
-          <a:xfrm>
-            <a:off x="1189462" y="821473"/>
-            <a:ext cx="7233425" cy="4031873"/>
-          </a:xfrm>
-          <a:prstGeom prst="rect">
-            <a:avLst/>
-          </a:prstGeom>
-          <a:noFill/>
-        </p:spPr>
-        <p:txBody>
-          <a:bodyPr wrap="square" rtlCol="0">
-            <a:spAutoFit/>
-          </a:bodyPr>
-          <a:lstStyle/>
-          <a:p>
-            <a:pPr marL="457200" indent="-457200">
-              <a:buFont typeface="Arial" panose="020B0604020202020204" pitchFamily="34" charset="0"/>
-              <a:buChar char="•"/>
-            </a:pPr>
-            <a:r>
-              <a:rPr lang="en-US" sz="1600" dirty="0"/>
-              <a:t>Next token prediction in RNNs can produce statistical learning effects (not surprising).</a:t>
-            </a:r>
-          </a:p>
-          <a:p>
-            <a:pPr marL="457200" indent="-457200">
-              <a:buFont typeface="Arial" panose="020B0604020202020204" pitchFamily="34" charset="0"/>
-              <a:buChar char="•"/>
-            </a:pPr>
-            <a:r>
-              <a:rPr lang="en-US" sz="1600" dirty="0"/>
-              <a:t>Various lexical features can be read out from neurons – more neurons, easier readout.</a:t>
-            </a:r>
-          </a:p>
-          <a:p>
-            <a:pPr marL="457200" indent="-457200">
-              <a:buFont typeface="Arial" panose="020B0604020202020204" pitchFamily="34" charset="0"/>
-              <a:buChar char="•"/>
-            </a:pPr>
-            <a:r>
-              <a:rPr lang="en-US" sz="1600" dirty="0"/>
-              <a:t>DFA state is most easily read out, but letter position, input character, and so on are also readable.</a:t>
-            </a:r>
-          </a:p>
-          <a:p>
-            <a:pPr marL="457200" indent="-457200">
-              <a:buFont typeface="Arial" panose="020B0604020202020204" pitchFamily="34" charset="0"/>
-              <a:buChar char="•"/>
-            </a:pPr>
-            <a:r>
-              <a:rPr lang="en-US" sz="1600" dirty="0"/>
-              <a:t>Information about lexical properties is distributed throughout the network, not in single-unit activity.</a:t>
-            </a:r>
-          </a:p>
-          <a:p>
-            <a:pPr marL="457200" indent="-457200">
-              <a:buFont typeface="Arial" panose="020B0604020202020204" pitchFamily="34" charset="0"/>
-              <a:buChar char="•"/>
-            </a:pPr>
-            <a:r>
-              <a:rPr lang="en-US" sz="1600" dirty="0"/>
-              <a:t>Increasing DFA states in the task increases difficult of learning and readout.</a:t>
-            </a:r>
-          </a:p>
-          <a:p>
-            <a:pPr marL="457200" indent="-457200">
-              <a:buFont typeface="Arial" panose="020B0604020202020204" pitchFamily="34" charset="0"/>
-              <a:buChar char="•"/>
-            </a:pPr>
-            <a:r>
-              <a:rPr lang="en-US" sz="1600" dirty="0"/>
-              <a:t>Increasing DFA states makes the internal representation higher dimensional (PC space).</a:t>
-            </a:r>
-          </a:p>
-          <a:p>
-            <a:pPr marL="457200" indent="-457200">
-              <a:buFont typeface="Arial" panose="020B0604020202020204" pitchFamily="34" charset="0"/>
-              <a:buChar char="•"/>
-            </a:pPr>
-            <a:r>
-              <a:rPr lang="en-US" sz="1600" dirty="0"/>
-              <a:t>Consequently, more complex vocabularies result in network structure with less recurrency and fewer cyclic/bidirectional motifs. </a:t>
-            </a:r>
-          </a:p>
-          <a:p>
-            <a:pPr marL="457200" indent="-457200">
-              <a:buFont typeface="Arial" panose="020B0604020202020204" pitchFamily="34" charset="0"/>
-              <a:buChar char="•"/>
-            </a:pPr>
-            <a:r>
-              <a:rPr lang="en-US" sz="1600" dirty="0"/>
-              <a:t>More complex vocabularies also result in broader input weight distribution (not sure why).</a:t>
-            </a:r>
-          </a:p>
-        </p:txBody>
-      </p:sp>
-    </p:spTree>
-    <p:extLst>
-      <p:ext uri="{BB962C8B-B14F-4D97-AF65-F5344CB8AC3E}">
-        <p14:creationId xmlns:p14="http://schemas.microsoft.com/office/powerpoint/2010/main" val="3701653733"/>
-      </p:ext>
-    </p:extLst>
-  </p:cSld>
-  <p:clrMapOvr>
-    <a:masterClrMapping/>
-  </p:clrMapOvr>
-</p:sld>
-</file>
-
-<file path=ppt/slides/slide31.xml><?xml version="1.0" encoding="utf-8"?>
-<p:sld xmlns:a="http://schemas.openxmlformats.org/drawingml/2006/main" xmlns:r="http://schemas.openxmlformats.org/officeDocument/2006/relationships" xmlns:p="http://schemas.openxmlformats.org/presentationml/2006/main">
-  <p:cSld>
-    <p:spTree>
-      <p:nvGrpSpPr>
-        <p:cNvPr id="1" name=""/>
-        <p:cNvGrpSpPr/>
-        <p:nvPr/>
-      </p:nvGrpSpPr>
-      <p:grpSpPr>
-        <a:xfrm>
-          <a:off x="0" y="0"/>
-          <a:ext cx="0" cy="0"/>
-          <a:chOff x="0" y="0"/>
-          <a:chExt cx="0" cy="0"/>
-        </a:xfrm>
-      </p:grpSpPr>
-      <p:sp>
-        <p:nvSpPr>
-          <p:cNvPr id="3" name="TextBox 2">
-            <a:extLst>
-              <a:ext uri="{FF2B5EF4-FFF2-40B4-BE49-F238E27FC236}">
-                <a16:creationId xmlns:a16="http://schemas.microsoft.com/office/drawing/2014/main" id="{A8628F4F-3133-AFDA-DE6A-6F9898670794}"/>
-              </a:ext>
-            </a:extLst>
-          </p:cNvPr>
-          <p:cNvSpPr txBox="1"/>
-          <p:nvPr/>
-        </p:nvSpPr>
-        <p:spPr>
-          <a:xfrm>
-            <a:off x="3802567" y="251344"/>
-            <a:ext cx="1289824" cy="523220"/>
-          </a:xfrm>
-          <a:prstGeom prst="rect">
-            <a:avLst/>
-          </a:prstGeom>
-          <a:noFill/>
-        </p:spPr>
-        <p:txBody>
-          <a:bodyPr wrap="square">
-            <a:spAutoFit/>
-          </a:bodyPr>
-          <a:lstStyle/>
-          <a:p>
-            <a:r>
-              <a:rPr lang="en-US" sz="2800" dirty="0"/>
-              <a:t>TODO</a:t>
-            </a:r>
-            <a:endParaRPr lang="en-US" dirty="0"/>
-          </a:p>
-        </p:txBody>
-      </p:sp>
-      <p:sp>
-        <p:nvSpPr>
-          <p:cNvPr id="5" name="TextBox 4">
-            <a:extLst>
-              <a:ext uri="{FF2B5EF4-FFF2-40B4-BE49-F238E27FC236}">
-                <a16:creationId xmlns:a16="http://schemas.microsoft.com/office/drawing/2014/main" id="{5193A0E3-C158-E53A-79C7-F8DD16460670}"/>
-              </a:ext>
-            </a:extLst>
-          </p:cNvPr>
-          <p:cNvSpPr txBox="1"/>
-          <p:nvPr/>
-        </p:nvSpPr>
-        <p:spPr>
-          <a:xfrm>
-            <a:off x="1189462" y="821473"/>
-            <a:ext cx="7233425" cy="2308324"/>
-          </a:xfrm>
-          <a:prstGeom prst="rect">
-            <a:avLst/>
-          </a:prstGeom>
-          <a:noFill/>
-        </p:spPr>
-        <p:txBody>
-          <a:bodyPr wrap="square" rtlCol="0">
-            <a:spAutoFit/>
-          </a:bodyPr>
-          <a:lstStyle/>
-          <a:p>
-            <a:pPr marL="457200" indent="-457200">
-              <a:buFont typeface="Arial" panose="020B0604020202020204" pitchFamily="34" charset="0"/>
-              <a:buChar char="•"/>
-            </a:pPr>
-            <a:r>
-              <a:rPr lang="en-US" sz="1600" dirty="0"/>
-              <a:t>Apply Dale’s law, see influence on encoding and motifs.</a:t>
-            </a:r>
-            <a:br>
-              <a:rPr lang="en-US" sz="1600" dirty="0"/>
-            </a:br>
-            <a:endParaRPr lang="en-US" sz="1600" dirty="0"/>
-          </a:p>
-          <a:p>
-            <a:pPr marL="457200" indent="-457200">
-              <a:buFont typeface="Arial" panose="020B0604020202020204" pitchFamily="34" charset="0"/>
-              <a:buChar char="•"/>
-            </a:pPr>
-            <a:r>
-              <a:rPr lang="en-US" sz="1600" dirty="0"/>
-              <a:t>Train on different task – word classification – observe influence on encoding.</a:t>
-            </a:r>
-            <a:br>
-              <a:rPr lang="en-US" sz="1600" dirty="0"/>
-            </a:br>
-            <a:endParaRPr lang="en-US" sz="1600" dirty="0"/>
-          </a:p>
-          <a:p>
-            <a:pPr marL="457200" indent="-457200">
-              <a:buFont typeface="Arial" panose="020B0604020202020204" pitchFamily="34" charset="0"/>
-              <a:buChar char="•"/>
-            </a:pPr>
-            <a:r>
-              <a:rPr lang="en-US" sz="1600" dirty="0"/>
-              <a:t>Figure out why the input weight distribution increases relative to recurrent on more complex vocabularies.</a:t>
-            </a:r>
-            <a:br>
-              <a:rPr lang="en-US" sz="1600" dirty="0"/>
-            </a:br>
-            <a:endParaRPr lang="en-US" sz="1600" dirty="0"/>
-          </a:p>
-          <a:p>
-            <a:pPr marL="457200" indent="-457200">
-              <a:buFont typeface="Arial" panose="020B0604020202020204" pitchFamily="34" charset="0"/>
-              <a:buChar char="•"/>
-            </a:pPr>
-            <a:r>
-              <a:rPr lang="en-US" sz="1600" dirty="0"/>
-              <a:t>Explore question of low single unit selectivity (</a:t>
-            </a:r>
-            <a:r>
-              <a:rPr lang="en-US" sz="1600"/>
-              <a:t>Daneila concept neurons).</a:t>
-            </a:r>
-            <a:endParaRPr lang="en-US" sz="1600" dirty="0"/>
-          </a:p>
-        </p:txBody>
-      </p:sp>
-    </p:spTree>
-    <p:extLst>
-      <p:ext uri="{BB962C8B-B14F-4D97-AF65-F5344CB8AC3E}">
-        <p14:creationId xmlns:p14="http://schemas.microsoft.com/office/powerpoint/2010/main" val="471548955"/>
-      </p:ext>
-    </p:extLst>
-  </p:cSld>
-  <p:clrMapOvr>
-    <a:masterClrMapping/>
-  </p:clrMapOvr>
-</p:sld>
-</file>
-
-<file path=ppt/slides/slide4.xml><?xml version="1.0" encoding="utf-8"?>
-<p:sld xmlns:a="http://schemas.openxmlformats.org/drawingml/2006/main" xmlns:r="http://schemas.openxmlformats.org/officeDocument/2006/relationships" xmlns:p="http://schemas.openxmlformats.org/presentationml/2006/main" show="0">
-  <p:cSld>
-    <p:spTree>
-      <p:nvGrpSpPr>
-        <p:cNvPr id="1" name="Shape 152"/>
-        <p:cNvGrpSpPr/>
-        <p:nvPr/>
-      </p:nvGrpSpPr>
-      <p:grpSpPr>
-        <a:xfrm>
-          <a:off x="0" y="0"/>
-          <a:ext cx="0" cy="0"/>
-          <a:chOff x="0" y="0"/>
-          <a:chExt cx="0" cy="0"/>
-        </a:xfrm>
-      </p:grpSpPr>
-      <p:sp>
-        <p:nvSpPr>
-          <p:cNvPr id="153" name="Google Shape;153;p29"/>
-          <p:cNvSpPr txBox="1">
-            <a:spLocks noGrp="1"/>
-          </p:cNvSpPr>
-          <p:nvPr>
-            <p:ph type="title"/>
-          </p:nvPr>
-        </p:nvSpPr>
-        <p:spPr>
-          <a:xfrm>
-            <a:off x="311700" y="445025"/>
-            <a:ext cx="8520600" cy="572700"/>
-          </a:xfrm>
-          <a:prstGeom prst="rect">
-            <a:avLst/>
-          </a:prstGeom>
-        </p:spPr>
-        <p:txBody>
-          <a:bodyPr spcFirstLastPara="1" wrap="square" lIns="91425" tIns="91425" rIns="91425" bIns="91425" anchor="t" anchorCtr="0">
-            <a:normAutofit fontScale="90000"/>
-          </a:bodyPr>
-          <a:lstStyle/>
-          <a:p>
-            <a:pPr marL="0" lvl="0" indent="0" algn="ctr" rtl="0">
-              <a:spcBef>
-                <a:spcPts val="0"/>
-              </a:spcBef>
-              <a:spcAft>
-                <a:spcPts val="0"/>
-              </a:spcAft>
-              <a:buNone/>
-            </a:pPr>
-            <a:r>
-              <a:rPr lang="en"/>
-              <a:t>Specific questions to be addressed</a:t>
-            </a:r>
-            <a:endParaRPr/>
-          </a:p>
-          <a:p>
-            <a:pPr marL="0" lvl="0" indent="0" algn="ctr" rtl="0">
-              <a:spcBef>
-                <a:spcPts val="0"/>
-              </a:spcBef>
-              <a:spcAft>
-                <a:spcPts val="0"/>
-              </a:spcAft>
-              <a:buNone/>
-            </a:pPr>
-            <a:endParaRPr/>
-          </a:p>
-        </p:txBody>
-      </p:sp>
-      <p:sp>
-        <p:nvSpPr>
-          <p:cNvPr id="154" name="Google Shape;154;p29"/>
-          <p:cNvSpPr txBox="1">
-            <a:spLocks noGrp="1"/>
-          </p:cNvSpPr>
-          <p:nvPr>
-            <p:ph type="body" idx="1"/>
-          </p:nvPr>
-        </p:nvSpPr>
-        <p:spPr>
-          <a:xfrm>
-            <a:off x="311700" y="1152475"/>
-            <a:ext cx="8520600" cy="3762600"/>
-          </a:xfrm>
-          <a:prstGeom prst="rect">
-            <a:avLst/>
-          </a:prstGeom>
-        </p:spPr>
-        <p:txBody>
-          <a:bodyPr spcFirstLastPara="1" wrap="square" lIns="91425" tIns="91425" rIns="91425" bIns="91425" anchor="t" anchorCtr="0">
-            <a:normAutofit fontScale="77500" lnSpcReduction="20000"/>
-          </a:bodyPr>
-          <a:lstStyle/>
-          <a:p>
-            <a:pPr marL="457200" lvl="0" indent="-317183" algn="l" rtl="0">
-              <a:lnSpc>
-                <a:spcPct val="200000"/>
-              </a:lnSpc>
-              <a:spcBef>
-                <a:spcPts val="0"/>
-              </a:spcBef>
-              <a:spcAft>
-                <a:spcPts val="0"/>
-              </a:spcAft>
-              <a:buSzPct val="100000"/>
-              <a:buAutoNum type="arabicPeriod"/>
-            </a:pPr>
-            <a:r>
-              <a:rPr lang="en"/>
-              <a:t>What do trajectory geometries generally look like for learned sequences (words)?</a:t>
-            </a:r>
-            <a:endParaRPr/>
-          </a:p>
-          <a:p>
-            <a:pPr marL="457200" lvl="0" indent="-317183" algn="l" rtl="0">
-              <a:lnSpc>
-                <a:spcPct val="200000"/>
-              </a:lnSpc>
-              <a:spcBef>
-                <a:spcPts val="0"/>
-              </a:spcBef>
-              <a:spcAft>
-                <a:spcPts val="0"/>
-              </a:spcAft>
-              <a:buSzPct val="100000"/>
-              <a:buAutoNum type="arabicPeriod"/>
-            </a:pPr>
-            <a:r>
-              <a:rPr lang="en"/>
-              <a:t>How stable is the representational geometry over multiple random seeds? (Multiple realizability).</a:t>
-            </a:r>
-            <a:endParaRPr/>
-          </a:p>
-          <a:p>
-            <a:pPr marL="457200" lvl="0" indent="-317183" algn="l" rtl="0">
-              <a:lnSpc>
-                <a:spcPct val="200000"/>
-              </a:lnSpc>
-              <a:spcBef>
-                <a:spcPts val="0"/>
-              </a:spcBef>
-              <a:spcAft>
-                <a:spcPts val="0"/>
-              </a:spcAft>
-              <a:buSzPct val="100000"/>
-              <a:buAutoNum type="arabicPeriod"/>
-            </a:pPr>
-            <a:r>
-              <a:rPr lang="en"/>
-              <a:t>How does word length influence trajectory geometry?</a:t>
-            </a:r>
-            <a:endParaRPr/>
-          </a:p>
-          <a:p>
-            <a:pPr marL="457200" lvl="0" indent="-317183" algn="l" rtl="0">
-              <a:lnSpc>
-                <a:spcPct val="200000"/>
-              </a:lnSpc>
-              <a:spcBef>
-                <a:spcPts val="0"/>
-              </a:spcBef>
-              <a:spcAft>
-                <a:spcPts val="0"/>
-              </a:spcAft>
-              <a:buSzPct val="100000"/>
-              <a:buAutoNum type="arabicPeriod"/>
-            </a:pPr>
-            <a:r>
-              <a:rPr lang="en"/>
-              <a:t>How does the number of words stored influence trajectory geometry?</a:t>
-            </a:r>
-            <a:endParaRPr/>
-          </a:p>
-          <a:p>
-            <a:pPr marL="457200" lvl="0" indent="-317183" algn="l" rtl="0">
-              <a:lnSpc>
-                <a:spcPct val="200000"/>
-              </a:lnSpc>
-              <a:spcBef>
-                <a:spcPts val="0"/>
-              </a:spcBef>
-              <a:spcAft>
-                <a:spcPts val="0"/>
-              </a:spcAft>
-              <a:buSzPct val="100000"/>
-              <a:buAutoNum type="arabicPeriod"/>
-            </a:pPr>
-            <a:r>
-              <a:rPr lang="en"/>
-              <a:t>Why does the trajectory geometry look the way it does?</a:t>
-            </a:r>
-            <a:endParaRPr/>
-          </a:p>
-          <a:p>
-            <a:pPr marL="457200" lvl="0" indent="-317183" algn="l" rtl="0">
-              <a:lnSpc>
-                <a:spcPct val="200000"/>
-              </a:lnSpc>
-              <a:spcBef>
-                <a:spcPts val="0"/>
-              </a:spcBef>
-              <a:spcAft>
-                <a:spcPts val="0"/>
-              </a:spcAft>
-              <a:buSzPct val="100000"/>
-              <a:buAutoNum type="arabicPeriod"/>
-            </a:pPr>
-            <a:r>
-              <a:rPr lang="en"/>
-              <a:t>What sort of features (specific token, position in sequence, DFA state) are easily read out of the neural representation?</a:t>
-            </a:r>
-            <a:endParaRPr/>
-          </a:p>
-          <a:p>
-            <a:pPr marL="457200" lvl="0" indent="-317183" algn="l" rtl="0">
-              <a:lnSpc>
-                <a:spcPct val="200000"/>
-              </a:lnSpc>
-              <a:spcBef>
-                <a:spcPts val="0"/>
-              </a:spcBef>
-              <a:spcAft>
-                <a:spcPts val="0"/>
-              </a:spcAft>
-              <a:buSzPct val="100000"/>
-              <a:buAutoNum type="arabicPeriod"/>
-            </a:pPr>
-            <a:r>
-              <a:rPr lang="en"/>
-              <a:t>What sort of features do we see in single-neuron responses?</a:t>
-            </a:r>
-            <a:endParaRPr/>
-          </a:p>
-          <a:p>
-            <a:pPr marL="457200" lvl="0" indent="0" algn="l" rtl="0">
-              <a:spcBef>
-                <a:spcPts val="1200"/>
-              </a:spcBef>
-              <a:spcAft>
-                <a:spcPts val="1200"/>
-              </a:spcAft>
-              <a:buNone/>
-            </a:pPr>
-            <a:endParaRPr/>
-          </a:p>
-        </p:txBody>
-      </p:sp>
-    </p:spTree>
-  </p:cSld>
-  <p:clrMapOvr>
-    <a:masterClrMapping/>
-  </p:clrMapOvr>
-</p:sld>
-</file>
-
-<file path=ppt/slides/slide5.xml><?xml version="1.0" encoding="utf-8"?>
-<p:sld xmlns:a="http://schemas.openxmlformats.org/drawingml/2006/main" xmlns:r="http://schemas.openxmlformats.org/officeDocument/2006/relationships" xmlns:p="http://schemas.openxmlformats.org/presentationml/2006/main" show="0">
-  <p:cSld>
-    <p:spTree>
-      <p:nvGrpSpPr>
-        <p:cNvPr id="1" name="Shape 158"/>
-        <p:cNvGrpSpPr/>
-        <p:nvPr/>
-      </p:nvGrpSpPr>
-      <p:grpSpPr>
-        <a:xfrm>
-          <a:off x="0" y="0"/>
-          <a:ext cx="0" cy="0"/>
-          <a:chOff x="0" y="0"/>
-          <a:chExt cx="0" cy="0"/>
-        </a:xfrm>
-      </p:grpSpPr>
-      <p:sp>
-        <p:nvSpPr>
-          <p:cNvPr id="159" name="Google Shape;159;p30"/>
-          <p:cNvSpPr txBox="1">
-            <a:spLocks noGrp="1"/>
-          </p:cNvSpPr>
-          <p:nvPr>
-            <p:ph type="title"/>
-          </p:nvPr>
-        </p:nvSpPr>
-        <p:spPr>
-          <a:xfrm>
-            <a:off x="311700" y="445025"/>
-            <a:ext cx="8520600" cy="572700"/>
-          </a:xfrm>
-          <a:prstGeom prst="rect">
-            <a:avLst/>
-          </a:prstGeom>
-        </p:spPr>
-        <p:txBody>
-          <a:bodyPr spcFirstLastPara="1" wrap="square" lIns="91425" tIns="91425" rIns="91425" bIns="91425" anchor="t" anchorCtr="0">
-            <a:normAutofit fontScale="90000"/>
-          </a:bodyPr>
-          <a:lstStyle/>
-          <a:p>
-            <a:pPr marL="0" lvl="0" indent="0" algn="ctr" rtl="0">
-              <a:spcBef>
-                <a:spcPts val="0"/>
-              </a:spcBef>
-              <a:spcAft>
-                <a:spcPts val="0"/>
-              </a:spcAft>
-              <a:buNone/>
-            </a:pPr>
-            <a:r>
-              <a:rPr lang="en"/>
-              <a:t>Questions be addressed</a:t>
-            </a:r>
-            <a:endParaRPr/>
-          </a:p>
-          <a:p>
-            <a:pPr marL="0" lvl="0" indent="0" algn="ctr" rtl="0">
-              <a:spcBef>
-                <a:spcPts val="0"/>
-              </a:spcBef>
-              <a:spcAft>
-                <a:spcPts val="0"/>
-              </a:spcAft>
-              <a:buNone/>
-            </a:pPr>
-            <a:endParaRPr/>
-          </a:p>
-        </p:txBody>
-      </p:sp>
-      <p:sp>
-        <p:nvSpPr>
-          <p:cNvPr id="160" name="Google Shape;160;p30"/>
-          <p:cNvSpPr txBox="1">
-            <a:spLocks noGrp="1"/>
-          </p:cNvSpPr>
-          <p:nvPr>
-            <p:ph type="body" idx="1"/>
-          </p:nvPr>
-        </p:nvSpPr>
-        <p:spPr>
-          <a:xfrm>
-            <a:off x="311700" y="1152475"/>
-            <a:ext cx="8520600" cy="3762600"/>
-          </a:xfrm>
-          <a:prstGeom prst="rect">
-            <a:avLst/>
-          </a:prstGeom>
-        </p:spPr>
-        <p:txBody>
-          <a:bodyPr spcFirstLastPara="1" wrap="square" lIns="91425" tIns="91425" rIns="91425" bIns="91425" anchor="t" anchorCtr="0">
-            <a:noAutofit/>
-          </a:bodyPr>
-          <a:lstStyle/>
-          <a:p>
-            <a:pPr marL="457200" lvl="0" indent="-361950" algn="l" rtl="0">
-              <a:lnSpc>
-                <a:spcPct val="100000"/>
-              </a:lnSpc>
-              <a:spcBef>
-                <a:spcPts val="0"/>
-              </a:spcBef>
-              <a:spcAft>
-                <a:spcPts val="0"/>
-              </a:spcAft>
-              <a:buSzPts val="2100"/>
-              <a:buAutoNum type="arabicPeriod"/>
-            </a:pPr>
-            <a:r>
-              <a:rPr lang="en" sz="2100"/>
-              <a:t>How is lexical information (word position, character, etc.) represented in a recurrent network that learns to produce words?</a:t>
-            </a:r>
-            <a:endParaRPr sz="2100"/>
-          </a:p>
-          <a:p>
-            <a:pPr marL="457200" lvl="0" indent="0" algn="l" rtl="0">
-              <a:lnSpc>
-                <a:spcPct val="100000"/>
-              </a:lnSpc>
-              <a:spcBef>
-                <a:spcPts val="1200"/>
-              </a:spcBef>
-              <a:spcAft>
-                <a:spcPts val="0"/>
-              </a:spcAft>
-              <a:buNone/>
-            </a:pPr>
-            <a:endParaRPr sz="2100"/>
-          </a:p>
-          <a:p>
-            <a:pPr marL="457200" lvl="0" indent="-361950" algn="l" rtl="0">
-              <a:lnSpc>
-                <a:spcPct val="100000"/>
-              </a:lnSpc>
-              <a:spcBef>
-                <a:spcPts val="1200"/>
-              </a:spcBef>
-              <a:spcAft>
-                <a:spcPts val="0"/>
-              </a:spcAft>
-              <a:buSzPts val="2100"/>
-              <a:buAutoNum type="arabicPeriod"/>
-            </a:pPr>
-            <a:r>
-              <a:rPr lang="en" sz="2100"/>
-              <a:t>How does network’s representation of information change with vocabulary complexity?</a:t>
-            </a:r>
-            <a:endParaRPr sz="2100"/>
-          </a:p>
-          <a:p>
-            <a:pPr marL="457200" lvl="0" indent="0" algn="l" rtl="0">
-              <a:lnSpc>
-                <a:spcPct val="100000"/>
-              </a:lnSpc>
-              <a:spcBef>
-                <a:spcPts val="1200"/>
-              </a:spcBef>
-              <a:spcAft>
-                <a:spcPts val="0"/>
-              </a:spcAft>
-              <a:buNone/>
-            </a:pPr>
-            <a:endParaRPr sz="2100"/>
-          </a:p>
-          <a:p>
-            <a:pPr marL="457200" lvl="0" indent="-361950" algn="l" rtl="0">
-              <a:lnSpc>
-                <a:spcPct val="100000"/>
-              </a:lnSpc>
-              <a:spcBef>
-                <a:spcPts val="1200"/>
-              </a:spcBef>
-              <a:spcAft>
-                <a:spcPts val="0"/>
-              </a:spcAft>
-              <a:buSzPts val="2100"/>
-              <a:buAutoNum type="arabicPeriod"/>
-            </a:pPr>
-            <a:r>
-              <a:rPr lang="en" sz="2100"/>
-              <a:t>How do the network’s </a:t>
-            </a:r>
-            <a:r>
-              <a:rPr lang="en" sz="2100" i="1"/>
-              <a:t>weights </a:t>
-            </a:r>
-            <a:r>
-              <a:rPr lang="en" sz="2100"/>
-              <a:t>differ as a function of the complexity of the learned vocabulary (function-&gt;structure).</a:t>
-            </a:r>
-            <a:endParaRPr sz="2100"/>
-          </a:p>
-          <a:p>
-            <a:pPr marL="457200" lvl="0" indent="0" algn="l" rtl="0">
-              <a:spcBef>
-                <a:spcPts val="1200"/>
-              </a:spcBef>
-              <a:spcAft>
-                <a:spcPts val="1200"/>
-              </a:spcAft>
-              <a:buNone/>
-            </a:pPr>
-            <a:endParaRPr/>
-          </a:p>
-        </p:txBody>
-      </p:sp>
-    </p:spTree>
-  </p:cSld>
-  <p:clrMapOvr>
-    <a:masterClrMapping/>
-  </p:clrMapOvr>
-</p:sld>
-</file>
-
-<file path=ppt/slides/slide6.xml><?xml version="1.0" encoding="utf-8"?>
 <p:sld xmlns:a="http://schemas.openxmlformats.org/drawingml/2006/main" xmlns:r="http://schemas.openxmlformats.org/officeDocument/2006/relationships" xmlns:p="http://schemas.openxmlformats.org/presentationml/2006/main">
   <p:cSld>
     <p:spTree>
@@ -24733,7 +23761,414 @@
 </p:sld>
 </file>
 
-<file path=ppt/slides/slide7.xml><?xml version="1.0" encoding="utf-8"?>
+<file path=ppt/slides/slide30.xml><?xml version="1.0" encoding="utf-8"?>
+<p:sld xmlns:a="http://schemas.openxmlformats.org/drawingml/2006/main" xmlns:r="http://schemas.openxmlformats.org/officeDocument/2006/relationships" xmlns:p="http://schemas.openxmlformats.org/presentationml/2006/main">
+  <p:cSld>
+    <p:spTree>
+      <p:nvGrpSpPr>
+        <p:cNvPr id="1" name=""/>
+        <p:cNvGrpSpPr/>
+        <p:nvPr/>
+      </p:nvGrpSpPr>
+      <p:grpSpPr>
+        <a:xfrm>
+          <a:off x="0" y="0"/>
+          <a:ext cx="0" cy="0"/>
+          <a:chOff x="0" y="0"/>
+          <a:chExt cx="0" cy="0"/>
+        </a:xfrm>
+      </p:grpSpPr>
+      <p:sp>
+        <p:nvSpPr>
+          <p:cNvPr id="2" name="TextBox 1"/>
+          <p:cNvSpPr txBox="1"/>
+          <p:nvPr/>
+        </p:nvSpPr>
+        <p:spPr>
+          <a:xfrm>
+            <a:off x="182880" y="154305"/>
+            <a:ext cx="8778240" cy="617220"/>
+          </a:xfrm>
+          <a:prstGeom prst="rect">
+            <a:avLst/>
+          </a:prstGeom>
+          <a:noFill/>
+        </p:spPr>
+        <p:txBody>
+          <a:bodyPr wrap="square">
+            <a:spAutoFit/>
+          </a:bodyPr>
+          <a:lstStyle/>
+          <a:p>
+            <a:pPr>
+              <a:defRPr sz="1800" b="1"/>
+            </a:pPr>
+            <a:r>
+              <a:t>Weight graph structure and motifs vs DFA</a:t>
+            </a:r>
+          </a:p>
+        </p:txBody>
+      </p:sp>
+      <p:pic>
+        <p:nvPicPr>
+          <p:cNvPr id="3" name="Picture 2" descr="fig_weight_graph_motifs_vs_dfa.jpg"/>
+          <p:cNvPicPr>
+            <a:picLocks noChangeAspect="1"/>
+          </p:cNvPicPr>
+          <p:nvPr/>
+        </p:nvPicPr>
+        <p:blipFill>
+          <a:blip r:embed="rId2"/>
+          <a:stretch>
+            <a:fillRect/>
+          </a:stretch>
+        </p:blipFill>
+        <p:spPr>
+          <a:xfrm>
+            <a:off x="1388195" y="822960"/>
+            <a:ext cx="6367608" cy="4166235"/>
+          </a:xfrm>
+          <a:prstGeom prst="rect">
+            <a:avLst/>
+          </a:prstGeom>
+        </p:spPr>
+      </p:pic>
+    </p:spTree>
+  </p:cSld>
+  <p:clrMapOvr>
+    <a:masterClrMapping/>
+  </p:clrMapOvr>
+</p:sld>
+</file>
+
+<file path=ppt/slides/slide31.xml><?xml version="1.0" encoding="utf-8"?>
+<p:sld xmlns:a="http://schemas.openxmlformats.org/drawingml/2006/main" xmlns:r="http://schemas.openxmlformats.org/officeDocument/2006/relationships" xmlns:p="http://schemas.openxmlformats.org/presentationml/2006/main">
+  <p:cSld>
+    <p:spTree>
+      <p:nvGrpSpPr>
+        <p:cNvPr id="1" name=""/>
+        <p:cNvGrpSpPr/>
+        <p:nvPr/>
+      </p:nvGrpSpPr>
+      <p:grpSpPr>
+        <a:xfrm>
+          <a:off x="0" y="0"/>
+          <a:ext cx="0" cy="0"/>
+          <a:chOff x="0" y="0"/>
+          <a:chExt cx="0" cy="0"/>
+        </a:xfrm>
+      </p:grpSpPr>
+      <p:sp>
+        <p:nvSpPr>
+          <p:cNvPr id="2" name="TextBox 1">
+            <a:extLst>
+              <a:ext uri="{FF2B5EF4-FFF2-40B4-BE49-F238E27FC236}">
+                <a16:creationId xmlns:a16="http://schemas.microsoft.com/office/drawing/2014/main" id="{7EFD6A0E-3B42-9041-628C-61847C9DCDA0}"/>
+              </a:ext>
+            </a:extLst>
+          </p:cNvPr>
+          <p:cNvSpPr txBox="1"/>
+          <p:nvPr/>
+        </p:nvSpPr>
+        <p:spPr>
+          <a:xfrm>
+            <a:off x="2903034" y="170985"/>
+            <a:ext cx="3337932" cy="523220"/>
+          </a:xfrm>
+          <a:prstGeom prst="rect">
+            <a:avLst/>
+          </a:prstGeom>
+          <a:noFill/>
+        </p:spPr>
+        <p:txBody>
+          <a:bodyPr wrap="square" rtlCol="0">
+            <a:spAutoFit/>
+          </a:bodyPr>
+          <a:lstStyle/>
+          <a:p>
+            <a:pPr algn="ctr"/>
+            <a:r>
+              <a:rPr lang="en-US" sz="2800" dirty="0"/>
+              <a:t>Conclusions</a:t>
+            </a:r>
+          </a:p>
+        </p:txBody>
+      </p:sp>
+      <p:sp>
+        <p:nvSpPr>
+          <p:cNvPr id="6" name="TextBox 5">
+            <a:extLst>
+              <a:ext uri="{FF2B5EF4-FFF2-40B4-BE49-F238E27FC236}">
+                <a16:creationId xmlns:a16="http://schemas.microsoft.com/office/drawing/2014/main" id="{5A9CE7F4-11BD-A141-B547-B2C73CD3FFC3}"/>
+              </a:ext>
+            </a:extLst>
+          </p:cNvPr>
+          <p:cNvSpPr txBox="1"/>
+          <p:nvPr/>
+        </p:nvSpPr>
+        <p:spPr>
+          <a:xfrm>
+            <a:off x="1189462" y="821473"/>
+            <a:ext cx="7233425" cy="4031873"/>
+          </a:xfrm>
+          <a:prstGeom prst="rect">
+            <a:avLst/>
+          </a:prstGeom>
+          <a:noFill/>
+        </p:spPr>
+        <p:txBody>
+          <a:bodyPr wrap="square" rtlCol="0">
+            <a:spAutoFit/>
+          </a:bodyPr>
+          <a:lstStyle/>
+          <a:p>
+            <a:pPr marL="457200" indent="-457200">
+              <a:buFont typeface="Arial" panose="020B0604020202020204" pitchFamily="34" charset="0"/>
+              <a:buChar char="•"/>
+            </a:pPr>
+            <a:r>
+              <a:rPr lang="en-US" sz="1600" dirty="0"/>
+              <a:t>Next token prediction in RNNs can produce statistical learning effects (not surprising).</a:t>
+            </a:r>
+          </a:p>
+          <a:p>
+            <a:pPr marL="457200" indent="-457200">
+              <a:buFont typeface="Arial" panose="020B0604020202020204" pitchFamily="34" charset="0"/>
+              <a:buChar char="•"/>
+            </a:pPr>
+            <a:r>
+              <a:rPr lang="en-US" sz="1600" dirty="0"/>
+              <a:t>Various lexical features can be read out from neurons – more neurons, easier readout.</a:t>
+            </a:r>
+          </a:p>
+          <a:p>
+            <a:pPr marL="457200" indent="-457200">
+              <a:buFont typeface="Arial" panose="020B0604020202020204" pitchFamily="34" charset="0"/>
+              <a:buChar char="•"/>
+            </a:pPr>
+            <a:r>
+              <a:rPr lang="en-US" sz="1600" dirty="0"/>
+              <a:t>DFA state is most easily read out, but letter position, input character, and so on are also readable.</a:t>
+            </a:r>
+          </a:p>
+          <a:p>
+            <a:pPr marL="457200" indent="-457200">
+              <a:buFont typeface="Arial" panose="020B0604020202020204" pitchFamily="34" charset="0"/>
+              <a:buChar char="•"/>
+            </a:pPr>
+            <a:r>
+              <a:rPr lang="en-US" sz="1600" dirty="0"/>
+              <a:t>Information about lexical properties is distributed throughout the network, not in single-unit activity.</a:t>
+            </a:r>
+          </a:p>
+          <a:p>
+            <a:pPr marL="457200" indent="-457200">
+              <a:buFont typeface="Arial" panose="020B0604020202020204" pitchFamily="34" charset="0"/>
+              <a:buChar char="•"/>
+            </a:pPr>
+            <a:r>
+              <a:rPr lang="en-US" sz="1600" dirty="0"/>
+              <a:t>Increasing DFA states in the task increases difficult of learning and readout.</a:t>
+            </a:r>
+          </a:p>
+          <a:p>
+            <a:pPr marL="457200" indent="-457200">
+              <a:buFont typeface="Arial" panose="020B0604020202020204" pitchFamily="34" charset="0"/>
+              <a:buChar char="•"/>
+            </a:pPr>
+            <a:r>
+              <a:rPr lang="en-US" sz="1600" dirty="0"/>
+              <a:t>Increasing DFA states makes the internal representation higher dimensional (PC space).</a:t>
+            </a:r>
+          </a:p>
+          <a:p>
+            <a:pPr marL="457200" indent="-457200">
+              <a:buFont typeface="Arial" panose="020B0604020202020204" pitchFamily="34" charset="0"/>
+              <a:buChar char="•"/>
+            </a:pPr>
+            <a:r>
+              <a:rPr lang="en-US" sz="1600" dirty="0"/>
+              <a:t>Consequently, more complex vocabularies result in network structure with less recurrency and fewer cyclic/bidirectional motifs. </a:t>
+            </a:r>
+          </a:p>
+          <a:p>
+            <a:pPr marL="457200" indent="-457200">
+              <a:buFont typeface="Arial" panose="020B0604020202020204" pitchFamily="34" charset="0"/>
+              <a:buChar char="•"/>
+            </a:pPr>
+            <a:r>
+              <a:rPr lang="en-US" sz="1600" dirty="0"/>
+              <a:t>More complex vocabularies also result in broader input weight distribution (not sure why).</a:t>
+            </a:r>
+          </a:p>
+        </p:txBody>
+      </p:sp>
+    </p:spTree>
+    <p:extLst>
+      <p:ext uri="{BB962C8B-B14F-4D97-AF65-F5344CB8AC3E}">
+        <p14:creationId xmlns:p14="http://schemas.microsoft.com/office/powerpoint/2010/main" val="3701653733"/>
+      </p:ext>
+    </p:extLst>
+  </p:cSld>
+  <p:clrMapOvr>
+    <a:masterClrMapping/>
+  </p:clrMapOvr>
+</p:sld>
+</file>
+
+<file path=ppt/slides/slide32.xml><?xml version="1.0" encoding="utf-8"?>
+<p:sld xmlns:a="http://schemas.openxmlformats.org/drawingml/2006/main" xmlns:r="http://schemas.openxmlformats.org/officeDocument/2006/relationships" xmlns:p="http://schemas.openxmlformats.org/presentationml/2006/main">
+  <p:cSld>
+    <p:spTree>
+      <p:nvGrpSpPr>
+        <p:cNvPr id="1" name=""/>
+        <p:cNvGrpSpPr/>
+        <p:nvPr/>
+      </p:nvGrpSpPr>
+      <p:grpSpPr>
+        <a:xfrm>
+          <a:off x="0" y="0"/>
+          <a:ext cx="0" cy="0"/>
+          <a:chOff x="0" y="0"/>
+          <a:chExt cx="0" cy="0"/>
+        </a:xfrm>
+      </p:grpSpPr>
+      <p:sp>
+        <p:nvSpPr>
+          <p:cNvPr id="3" name="TextBox 2">
+            <a:extLst>
+              <a:ext uri="{FF2B5EF4-FFF2-40B4-BE49-F238E27FC236}">
+                <a16:creationId xmlns:a16="http://schemas.microsoft.com/office/drawing/2014/main" id="{A8628F4F-3133-AFDA-DE6A-6F9898670794}"/>
+              </a:ext>
+            </a:extLst>
+          </p:cNvPr>
+          <p:cNvSpPr txBox="1"/>
+          <p:nvPr/>
+        </p:nvSpPr>
+        <p:spPr>
+          <a:xfrm>
+            <a:off x="3802567" y="251344"/>
+            <a:ext cx="1289824" cy="523220"/>
+          </a:xfrm>
+          <a:prstGeom prst="rect">
+            <a:avLst/>
+          </a:prstGeom>
+          <a:noFill/>
+        </p:spPr>
+        <p:txBody>
+          <a:bodyPr wrap="square">
+            <a:spAutoFit/>
+          </a:bodyPr>
+          <a:lstStyle/>
+          <a:p>
+            <a:r>
+              <a:rPr lang="en-US" sz="2800" dirty="0"/>
+              <a:t>TODO</a:t>
+            </a:r>
+            <a:endParaRPr lang="en-US" dirty="0"/>
+          </a:p>
+        </p:txBody>
+      </p:sp>
+      <p:sp>
+        <p:nvSpPr>
+          <p:cNvPr id="5" name="TextBox 4">
+            <a:extLst>
+              <a:ext uri="{FF2B5EF4-FFF2-40B4-BE49-F238E27FC236}">
+                <a16:creationId xmlns:a16="http://schemas.microsoft.com/office/drawing/2014/main" id="{5193A0E3-C158-E53A-79C7-F8DD16460670}"/>
+              </a:ext>
+            </a:extLst>
+          </p:cNvPr>
+          <p:cNvSpPr txBox="1"/>
+          <p:nvPr/>
+        </p:nvSpPr>
+        <p:spPr>
+          <a:xfrm>
+            <a:off x="1189462" y="821473"/>
+            <a:ext cx="7233425" cy="2308324"/>
+          </a:xfrm>
+          <a:prstGeom prst="rect">
+            <a:avLst/>
+          </a:prstGeom>
+          <a:noFill/>
+        </p:spPr>
+        <p:txBody>
+          <a:bodyPr wrap="square" rtlCol="0">
+            <a:spAutoFit/>
+          </a:bodyPr>
+          <a:lstStyle/>
+          <a:p>
+            <a:pPr marL="457200" indent="-457200">
+              <a:buFont typeface="Arial" panose="020B0604020202020204" pitchFamily="34" charset="0"/>
+              <a:buChar char="•"/>
+            </a:pPr>
+            <a:r>
+              <a:rPr lang="en-US" sz="1600" dirty="0"/>
+              <a:t>Apply Dale’s law, see influence on encoding and motifs.</a:t>
+            </a:r>
+            <a:br>
+              <a:rPr lang="en-US" sz="1600" dirty="0"/>
+            </a:br>
+            <a:endParaRPr lang="en-US" sz="1600" dirty="0"/>
+          </a:p>
+          <a:p>
+            <a:pPr marL="457200" indent="-457200">
+              <a:buFont typeface="Arial" panose="020B0604020202020204" pitchFamily="34" charset="0"/>
+              <a:buChar char="•"/>
+            </a:pPr>
+            <a:r>
+              <a:rPr lang="en-US" sz="1600" dirty="0"/>
+              <a:t>Train on different task – word classification – observe influence on encoding.</a:t>
+            </a:r>
+            <a:br>
+              <a:rPr lang="en-US" sz="1600" dirty="0"/>
+            </a:br>
+            <a:endParaRPr lang="en-US" sz="1600" dirty="0"/>
+          </a:p>
+          <a:p>
+            <a:pPr marL="457200" indent="-457200">
+              <a:buFont typeface="Arial" panose="020B0604020202020204" pitchFamily="34" charset="0"/>
+              <a:buChar char="•"/>
+            </a:pPr>
+            <a:r>
+              <a:rPr lang="en-US" sz="1600" dirty="0"/>
+              <a:t>Figure out why the input weight distribution increases relative to recurrent on more complex vocabularies.</a:t>
+            </a:r>
+            <a:br>
+              <a:rPr lang="en-US" sz="1600" dirty="0"/>
+            </a:br>
+            <a:endParaRPr lang="en-US" sz="1600" dirty="0"/>
+          </a:p>
+          <a:p>
+            <a:pPr marL="457200" indent="-457200">
+              <a:buFont typeface="Arial" panose="020B0604020202020204" pitchFamily="34" charset="0"/>
+              <a:buChar char="•"/>
+            </a:pPr>
+            <a:r>
+              <a:rPr lang="en-US" sz="1600" dirty="0"/>
+              <a:t>Explore question of low single unit selectivity (</a:t>
+            </a:r>
+            <a:r>
+              <a:rPr lang="en-US" sz="1600"/>
+              <a:t>Daneila concept neurons).</a:t>
+            </a:r>
+            <a:endParaRPr lang="en-US" sz="1600" dirty="0"/>
+          </a:p>
+        </p:txBody>
+      </p:sp>
+    </p:spTree>
+    <p:extLst>
+      <p:ext uri="{BB962C8B-B14F-4D97-AF65-F5344CB8AC3E}">
+        <p14:creationId xmlns:p14="http://schemas.microsoft.com/office/powerpoint/2010/main" val="471548955"/>
+      </p:ext>
+    </p:extLst>
+  </p:cSld>
+  <p:clrMapOvr>
+    <a:masterClrMapping/>
+  </p:clrMapOvr>
+</p:sld>
+</file>
+
+<file path=ppt/slides/slide4.xml><?xml version="1.0" encoding="utf-8"?>
 <p:sld xmlns:a="http://schemas.openxmlformats.org/drawingml/2006/main" xmlns:r="http://schemas.openxmlformats.org/officeDocument/2006/relationships" xmlns:p="http://schemas.openxmlformats.org/presentationml/2006/main">
   <p:cSld>
     <p:spTree>
@@ -25999,7 +25434,921 @@
 </p:sld>
 </file>
 
+<file path=ppt/slides/slide5.xml><?xml version="1.0" encoding="utf-8"?>
+<p:sld xmlns:a="http://schemas.openxmlformats.org/drawingml/2006/main" xmlns:r="http://schemas.openxmlformats.org/officeDocument/2006/relationships" xmlns:p="http://schemas.openxmlformats.org/presentationml/2006/main">
+  <p:cSld>
+    <p:spTree>
+      <p:nvGrpSpPr>
+        <p:cNvPr id="1" name=""/>
+        <p:cNvGrpSpPr/>
+        <p:nvPr/>
+      </p:nvGrpSpPr>
+      <p:grpSpPr>
+        <a:xfrm>
+          <a:off x="0" y="0"/>
+          <a:ext cx="0" cy="0"/>
+          <a:chOff x="0" y="0"/>
+          <a:chExt cx="0" cy="0"/>
+        </a:xfrm>
+      </p:grpSpPr>
+      <p:sp>
+        <p:nvSpPr>
+          <p:cNvPr id="2" name="Title 1">
+            <a:extLst>
+              <a:ext uri="{FF2B5EF4-FFF2-40B4-BE49-F238E27FC236}">
+                <a16:creationId xmlns:a16="http://schemas.microsoft.com/office/drawing/2014/main" id="{049A5862-12B9-F403-A1EF-76E0A1E6DCBF}"/>
+              </a:ext>
+            </a:extLst>
+          </p:cNvPr>
+          <p:cNvSpPr>
+            <a:spLocks noGrp="1"/>
+          </p:cNvSpPr>
+          <p:nvPr>
+            <p:ph type="title"/>
+          </p:nvPr>
+        </p:nvSpPr>
+        <p:spPr/>
+        <p:txBody>
+          <a:bodyPr/>
+          <a:lstStyle/>
+          <a:p>
+            <a:r>
+              <a:rPr lang="en-US" dirty="0"/>
+              <a:t>Generic statistical learning</a:t>
+            </a:r>
+            <a:endParaRPr lang="en-IL" dirty="0"/>
+          </a:p>
+        </p:txBody>
+      </p:sp>
+      <p:sp>
+        <p:nvSpPr>
+          <p:cNvPr id="5" name="TextBox 4">
+            <a:extLst>
+              <a:ext uri="{FF2B5EF4-FFF2-40B4-BE49-F238E27FC236}">
+                <a16:creationId xmlns:a16="http://schemas.microsoft.com/office/drawing/2014/main" id="{A4CB0D35-F5BB-39FD-162C-B5260F9BF180}"/>
+              </a:ext>
+            </a:extLst>
+          </p:cNvPr>
+          <p:cNvSpPr txBox="1"/>
+          <p:nvPr/>
+        </p:nvSpPr>
+        <p:spPr>
+          <a:xfrm>
+            <a:off x="4537788" y="4598968"/>
+            <a:ext cx="4572000" cy="338554"/>
+          </a:xfrm>
+          <a:prstGeom prst="rect">
+            <a:avLst/>
+          </a:prstGeom>
+          <a:noFill/>
+        </p:spPr>
+        <p:txBody>
+          <a:bodyPr wrap="square">
+            <a:spAutoFit/>
+          </a:bodyPr>
+          <a:lstStyle/>
+          <a:p>
+            <a:r>
+              <a:rPr lang="en-IL" sz="800" b="0" i="0" dirty="0">
+                <a:solidFill>
+                  <a:srgbClr val="222222"/>
+                </a:solidFill>
+                <a:effectLst/>
+                <a:latin typeface="-apple-system"/>
+              </a:rPr>
+              <a:t>Sun, W., </a:t>
+            </a:r>
+            <a:r>
+              <a:rPr lang="en-IL" sz="800" b="0" i="0" dirty="0" err="1">
+                <a:solidFill>
+                  <a:srgbClr val="222222"/>
+                </a:solidFill>
+                <a:effectLst/>
+                <a:latin typeface="-apple-system"/>
+              </a:rPr>
+              <a:t>Winnubst</a:t>
+            </a:r>
+            <a:r>
+              <a:rPr lang="en-IL" sz="800" b="0" i="0" dirty="0">
+                <a:solidFill>
+                  <a:srgbClr val="222222"/>
+                </a:solidFill>
+                <a:effectLst/>
+                <a:latin typeface="-apple-system"/>
+              </a:rPr>
+              <a:t>, J., Natrajan, M. </a:t>
+            </a:r>
+            <a:r>
+              <a:rPr lang="en-IL" sz="800" b="0" i="1" dirty="0">
+                <a:solidFill>
+                  <a:srgbClr val="222222"/>
+                </a:solidFill>
+                <a:effectLst/>
+                <a:latin typeface="-apple-system"/>
+              </a:rPr>
+              <a:t>et al.</a:t>
+            </a:r>
+            <a:r>
+              <a:rPr lang="en-IL" sz="800" b="0" i="0" dirty="0">
+                <a:solidFill>
+                  <a:srgbClr val="222222"/>
+                </a:solidFill>
+                <a:effectLst/>
+                <a:latin typeface="-apple-system"/>
+              </a:rPr>
+              <a:t> Learning produces an orthogonalized state machine in the hippocampus. </a:t>
+            </a:r>
+            <a:r>
+              <a:rPr lang="en-IL" sz="800" b="0" i="1" dirty="0">
+                <a:solidFill>
+                  <a:srgbClr val="222222"/>
+                </a:solidFill>
+                <a:effectLst/>
+                <a:latin typeface="-apple-system"/>
+              </a:rPr>
+              <a:t>Nature</a:t>
+            </a:r>
+            <a:r>
+              <a:rPr lang="en-IL" sz="800" b="0" i="0" dirty="0">
+                <a:solidFill>
+                  <a:srgbClr val="222222"/>
+                </a:solidFill>
+                <a:effectLst/>
+                <a:latin typeface="-apple-system"/>
+              </a:rPr>
+              <a:t> </a:t>
+            </a:r>
+            <a:r>
+              <a:rPr lang="en-IL" sz="800" b="1" i="0" dirty="0">
+                <a:solidFill>
+                  <a:srgbClr val="222222"/>
+                </a:solidFill>
+                <a:effectLst/>
+                <a:latin typeface="-apple-system"/>
+              </a:rPr>
+              <a:t>640</a:t>
+            </a:r>
+            <a:r>
+              <a:rPr lang="en-IL" sz="800" b="0" i="0" dirty="0">
+                <a:solidFill>
+                  <a:srgbClr val="222222"/>
+                </a:solidFill>
+                <a:effectLst/>
+                <a:latin typeface="-apple-system"/>
+              </a:rPr>
+              <a:t>, 165–175 (2025). https://doi.org/10.1038/s41586-024-08548-w</a:t>
+            </a:r>
+            <a:endParaRPr lang="en-IL" sz="800" dirty="0"/>
+          </a:p>
+        </p:txBody>
+      </p:sp>
+      <p:pic>
+        <p:nvPicPr>
+          <p:cNvPr id="7" name="Picture 6">
+            <a:extLst>
+              <a:ext uri="{FF2B5EF4-FFF2-40B4-BE49-F238E27FC236}">
+                <a16:creationId xmlns:a16="http://schemas.microsoft.com/office/drawing/2014/main" id="{7FEBCCC5-B125-A9A5-B7C2-E468C51F6CB1}"/>
+              </a:ext>
+            </a:extLst>
+          </p:cNvPr>
+          <p:cNvPicPr>
+            <a:picLocks noChangeAspect="1"/>
+          </p:cNvPicPr>
+          <p:nvPr/>
+        </p:nvPicPr>
+        <p:blipFill>
+          <a:blip r:embed="rId2"/>
+          <a:stretch>
+            <a:fillRect/>
+          </a:stretch>
+        </p:blipFill>
+        <p:spPr>
+          <a:xfrm>
+            <a:off x="2954894" y="1112017"/>
+            <a:ext cx="2878238" cy="2786718"/>
+          </a:xfrm>
+          <a:prstGeom prst="rect">
+            <a:avLst/>
+          </a:prstGeom>
+        </p:spPr>
+      </p:pic>
+      <p:sp>
+        <p:nvSpPr>
+          <p:cNvPr id="9" name="TextBox 8">
+            <a:extLst>
+              <a:ext uri="{FF2B5EF4-FFF2-40B4-BE49-F238E27FC236}">
+                <a16:creationId xmlns:a16="http://schemas.microsoft.com/office/drawing/2014/main" id="{7ECF4947-883D-0D09-BD96-0E900D7753FD}"/>
+              </a:ext>
+            </a:extLst>
+          </p:cNvPr>
+          <p:cNvSpPr txBox="1"/>
+          <p:nvPr/>
+        </p:nvSpPr>
+        <p:spPr>
+          <a:xfrm>
+            <a:off x="1921566" y="4094963"/>
+            <a:ext cx="5567464" cy="307777"/>
+          </a:xfrm>
+          <a:prstGeom prst="rect">
+            <a:avLst/>
+          </a:prstGeom>
+          <a:noFill/>
+        </p:spPr>
+        <p:txBody>
+          <a:bodyPr wrap="square">
+            <a:spAutoFit/>
+          </a:bodyPr>
+          <a:lstStyle/>
+          <a:p>
+            <a:r>
+              <a:rPr lang="en-US" b="0" i="0" dirty="0">
+                <a:solidFill>
+                  <a:srgbClr val="222222"/>
+                </a:solidFill>
+                <a:effectLst/>
+                <a:latin typeface="-apple-system"/>
+              </a:rPr>
+              <a:t>The two maze conditions are like two ‘words’ that need to be memorized.</a:t>
+            </a:r>
+            <a:endParaRPr lang="en-IL" dirty="0"/>
+          </a:p>
+        </p:txBody>
+      </p:sp>
+    </p:spTree>
+    <p:extLst>
+      <p:ext uri="{BB962C8B-B14F-4D97-AF65-F5344CB8AC3E}">
+        <p14:creationId xmlns:p14="http://schemas.microsoft.com/office/powerpoint/2010/main" val="419064044"/>
+      </p:ext>
+    </p:extLst>
+  </p:cSld>
+  <p:clrMapOvr>
+    <a:masterClrMapping/>
+  </p:clrMapOvr>
+</p:sld>
+</file>
+
+<file path=ppt/slides/slide6.xml><?xml version="1.0" encoding="utf-8"?>
+<p:sld xmlns:a="http://schemas.openxmlformats.org/drawingml/2006/main" xmlns:r="http://schemas.openxmlformats.org/officeDocument/2006/relationships" xmlns:p="http://schemas.openxmlformats.org/presentationml/2006/main">
+  <p:cSld>
+    <p:spTree>
+      <p:nvGrpSpPr>
+        <p:cNvPr id="1" name="Shape 146"/>
+        <p:cNvGrpSpPr/>
+        <p:nvPr/>
+      </p:nvGrpSpPr>
+      <p:grpSpPr>
+        <a:xfrm>
+          <a:off x="0" y="0"/>
+          <a:ext cx="0" cy="0"/>
+          <a:chOff x="0" y="0"/>
+          <a:chExt cx="0" cy="0"/>
+        </a:xfrm>
+      </p:grpSpPr>
+      <p:sp>
+        <p:nvSpPr>
+          <p:cNvPr id="147" name="Google Shape;147;p28"/>
+          <p:cNvSpPr txBox="1">
+            <a:spLocks noGrp="1"/>
+          </p:cNvSpPr>
+          <p:nvPr>
+            <p:ph type="title"/>
+          </p:nvPr>
+        </p:nvSpPr>
+        <p:spPr>
+          <a:xfrm>
+            <a:off x="311700" y="445025"/>
+            <a:ext cx="8520600" cy="572700"/>
+          </a:xfrm>
+          <a:prstGeom prst="rect">
+            <a:avLst/>
+          </a:prstGeom>
+        </p:spPr>
+        <p:txBody>
+          <a:bodyPr spcFirstLastPara="1" wrap="square" lIns="91425" tIns="91425" rIns="91425" bIns="91425" anchor="t" anchorCtr="0">
+            <a:normAutofit fontScale="90000"/>
+          </a:bodyPr>
+          <a:lstStyle/>
+          <a:p>
+            <a:pPr marL="0" lvl="0" indent="0" algn="ctr" rtl="0">
+              <a:spcBef>
+                <a:spcPts val="0"/>
+              </a:spcBef>
+              <a:spcAft>
+                <a:spcPts val="0"/>
+              </a:spcAft>
+              <a:buNone/>
+            </a:pPr>
+            <a:r>
+              <a:rPr lang="en"/>
+              <a:t>Assumptions</a:t>
+            </a:r>
+            <a:endParaRPr/>
+          </a:p>
+        </p:txBody>
+      </p:sp>
+      <p:sp>
+        <p:nvSpPr>
+          <p:cNvPr id="148" name="Google Shape;148;p28"/>
+          <p:cNvSpPr txBox="1">
+            <a:spLocks noGrp="1"/>
+          </p:cNvSpPr>
+          <p:nvPr>
+            <p:ph type="body" idx="1"/>
+          </p:nvPr>
+        </p:nvSpPr>
+        <p:spPr>
+          <a:xfrm>
+            <a:off x="311700" y="1152475"/>
+            <a:ext cx="8520600" cy="3416400"/>
+          </a:xfrm>
+          <a:prstGeom prst="rect">
+            <a:avLst/>
+          </a:prstGeom>
+        </p:spPr>
+        <p:txBody>
+          <a:bodyPr spcFirstLastPara="1" wrap="square" lIns="91425" tIns="91425" rIns="91425" bIns="91425" anchor="t" anchorCtr="0">
+            <a:normAutofit fontScale="92500" lnSpcReduction="10000"/>
+          </a:bodyPr>
+          <a:lstStyle/>
+          <a:p>
+            <a:pPr marL="457200" lvl="0" indent="-334328" algn="l" rtl="0">
+              <a:spcBef>
+                <a:spcPts val="0"/>
+              </a:spcBef>
+              <a:spcAft>
+                <a:spcPts val="0"/>
+              </a:spcAft>
+              <a:buSzPct val="100000"/>
+              <a:buAutoNum type="arabicPeriod"/>
+            </a:pPr>
+            <a:r>
+              <a:rPr lang="en"/>
+              <a:t>To a first approximation, the brain is a recurrent neural network.</a:t>
+            </a:r>
+            <a:endParaRPr/>
+          </a:p>
+          <a:p>
+            <a:pPr marL="457200" lvl="0" indent="-334328" algn="l" rtl="0">
+              <a:spcBef>
+                <a:spcPts val="1000"/>
+              </a:spcBef>
+              <a:spcAft>
+                <a:spcPts val="0"/>
+              </a:spcAft>
+              <a:buSzPct val="100000"/>
+              <a:buAutoNum type="arabicPeriod"/>
+            </a:pPr>
+            <a:r>
+              <a:rPr lang="en"/>
+              <a:t>The output of the brain at any given time is a function of the </a:t>
+            </a:r>
+            <a:r>
+              <a:rPr lang="en" i="1"/>
+              <a:t>state </a:t>
+            </a:r>
+            <a:r>
+              <a:rPr lang="en"/>
+              <a:t>of the network at that time; the output of the network over a period of time is a </a:t>
+            </a:r>
+            <a:r>
+              <a:rPr lang="en" i="1"/>
+              <a:t>trajectory</a:t>
+            </a:r>
+            <a:r>
+              <a:rPr lang="en"/>
+              <a:t> through the state space.</a:t>
+            </a:r>
+            <a:endParaRPr/>
+          </a:p>
+          <a:p>
+            <a:pPr marL="457200" lvl="0" indent="-334328" algn="l" rtl="0">
+              <a:spcBef>
+                <a:spcPts val="1000"/>
+              </a:spcBef>
+              <a:spcAft>
+                <a:spcPts val="0"/>
+              </a:spcAft>
+              <a:buSzPct val="100000"/>
+              <a:buAutoNum type="arabicPeriod"/>
+            </a:pPr>
+            <a:r>
+              <a:rPr lang="en"/>
+              <a:t>The brain originally learns sequences without any prior assumptions about sequence structure; all learned structure is emergent from naive next token prediction.</a:t>
+            </a:r>
+            <a:endParaRPr/>
+          </a:p>
+          <a:p>
+            <a:pPr marL="457200" lvl="0" indent="-334328" algn="l" rtl="0">
+              <a:spcBef>
+                <a:spcPts val="1000"/>
+              </a:spcBef>
+              <a:spcAft>
+                <a:spcPts val="0"/>
+              </a:spcAft>
+              <a:buSzPct val="100000"/>
+              <a:buAutoNum type="arabicPeriod"/>
+            </a:pPr>
+            <a:r>
+              <a:rPr lang="en"/>
+              <a:t>Once learned, the brain produces sequences via a closed loop process - it generates (predicts) a token, which is fed as an input to the network at the next time step.</a:t>
+            </a:r>
+            <a:endParaRPr/>
+          </a:p>
+          <a:p>
+            <a:pPr marL="0" lvl="0" indent="0" algn="l" rtl="0">
+              <a:spcBef>
+                <a:spcPts val="1000"/>
+              </a:spcBef>
+              <a:spcAft>
+                <a:spcPts val="1200"/>
+              </a:spcAft>
+              <a:buNone/>
+            </a:pPr>
+            <a:endParaRPr/>
+          </a:p>
+        </p:txBody>
+      </p:sp>
+    </p:spTree>
+  </p:cSld>
+  <p:clrMapOvr>
+    <a:masterClrMapping/>
+  </p:clrMapOvr>
+</p:sld>
+</file>
+
+<file path=ppt/slides/slide7.xml><?xml version="1.0" encoding="utf-8"?>
+<p:sld xmlns:a="http://schemas.openxmlformats.org/drawingml/2006/main" xmlns:r="http://schemas.openxmlformats.org/officeDocument/2006/relationships" xmlns:p="http://schemas.openxmlformats.org/presentationml/2006/main" show="0">
+  <p:cSld>
+    <p:spTree>
+      <p:nvGrpSpPr>
+        <p:cNvPr id="1" name="Shape 152"/>
+        <p:cNvGrpSpPr/>
+        <p:nvPr/>
+      </p:nvGrpSpPr>
+      <p:grpSpPr>
+        <a:xfrm>
+          <a:off x="0" y="0"/>
+          <a:ext cx="0" cy="0"/>
+          <a:chOff x="0" y="0"/>
+          <a:chExt cx="0" cy="0"/>
+        </a:xfrm>
+      </p:grpSpPr>
+      <p:sp>
+        <p:nvSpPr>
+          <p:cNvPr id="153" name="Google Shape;153;p29"/>
+          <p:cNvSpPr txBox="1">
+            <a:spLocks noGrp="1"/>
+          </p:cNvSpPr>
+          <p:nvPr>
+            <p:ph type="title"/>
+          </p:nvPr>
+        </p:nvSpPr>
+        <p:spPr>
+          <a:xfrm>
+            <a:off x="311700" y="445025"/>
+            <a:ext cx="8520600" cy="572700"/>
+          </a:xfrm>
+          <a:prstGeom prst="rect">
+            <a:avLst/>
+          </a:prstGeom>
+        </p:spPr>
+        <p:txBody>
+          <a:bodyPr spcFirstLastPara="1" wrap="square" lIns="91425" tIns="91425" rIns="91425" bIns="91425" anchor="t" anchorCtr="0">
+            <a:normAutofit fontScale="90000"/>
+          </a:bodyPr>
+          <a:lstStyle/>
+          <a:p>
+            <a:pPr marL="0" lvl="0" indent="0" algn="ctr" rtl="0">
+              <a:spcBef>
+                <a:spcPts val="0"/>
+              </a:spcBef>
+              <a:spcAft>
+                <a:spcPts val="0"/>
+              </a:spcAft>
+              <a:buNone/>
+            </a:pPr>
+            <a:r>
+              <a:rPr lang="en"/>
+              <a:t>Specific questions to be addressed</a:t>
+            </a:r>
+            <a:endParaRPr/>
+          </a:p>
+          <a:p>
+            <a:pPr marL="0" lvl="0" indent="0" algn="ctr" rtl="0">
+              <a:spcBef>
+                <a:spcPts val="0"/>
+              </a:spcBef>
+              <a:spcAft>
+                <a:spcPts val="0"/>
+              </a:spcAft>
+              <a:buNone/>
+            </a:pPr>
+            <a:endParaRPr/>
+          </a:p>
+        </p:txBody>
+      </p:sp>
+      <p:sp>
+        <p:nvSpPr>
+          <p:cNvPr id="154" name="Google Shape;154;p29"/>
+          <p:cNvSpPr txBox="1">
+            <a:spLocks noGrp="1"/>
+          </p:cNvSpPr>
+          <p:nvPr>
+            <p:ph type="body" idx="1"/>
+          </p:nvPr>
+        </p:nvSpPr>
+        <p:spPr>
+          <a:xfrm>
+            <a:off x="311700" y="1152475"/>
+            <a:ext cx="8520600" cy="3762600"/>
+          </a:xfrm>
+          <a:prstGeom prst="rect">
+            <a:avLst/>
+          </a:prstGeom>
+        </p:spPr>
+        <p:txBody>
+          <a:bodyPr spcFirstLastPara="1" wrap="square" lIns="91425" tIns="91425" rIns="91425" bIns="91425" anchor="t" anchorCtr="0">
+            <a:normAutofit fontScale="77500" lnSpcReduction="20000"/>
+          </a:bodyPr>
+          <a:lstStyle/>
+          <a:p>
+            <a:pPr marL="457200" lvl="0" indent="-317183" algn="l" rtl="0">
+              <a:lnSpc>
+                <a:spcPct val="200000"/>
+              </a:lnSpc>
+              <a:spcBef>
+                <a:spcPts val="0"/>
+              </a:spcBef>
+              <a:spcAft>
+                <a:spcPts val="0"/>
+              </a:spcAft>
+              <a:buSzPct val="100000"/>
+              <a:buAutoNum type="arabicPeriod"/>
+            </a:pPr>
+            <a:r>
+              <a:rPr lang="en"/>
+              <a:t>What do trajectory geometries generally look like for learned sequences (words)?</a:t>
+            </a:r>
+            <a:endParaRPr/>
+          </a:p>
+          <a:p>
+            <a:pPr marL="457200" lvl="0" indent="-317183" algn="l" rtl="0">
+              <a:lnSpc>
+                <a:spcPct val="200000"/>
+              </a:lnSpc>
+              <a:spcBef>
+                <a:spcPts val="0"/>
+              </a:spcBef>
+              <a:spcAft>
+                <a:spcPts val="0"/>
+              </a:spcAft>
+              <a:buSzPct val="100000"/>
+              <a:buAutoNum type="arabicPeriod"/>
+            </a:pPr>
+            <a:r>
+              <a:rPr lang="en"/>
+              <a:t>How stable is the representational geometry over multiple random seeds? (Multiple realizability).</a:t>
+            </a:r>
+            <a:endParaRPr/>
+          </a:p>
+          <a:p>
+            <a:pPr marL="457200" lvl="0" indent="-317183" algn="l" rtl="0">
+              <a:lnSpc>
+                <a:spcPct val="200000"/>
+              </a:lnSpc>
+              <a:spcBef>
+                <a:spcPts val="0"/>
+              </a:spcBef>
+              <a:spcAft>
+                <a:spcPts val="0"/>
+              </a:spcAft>
+              <a:buSzPct val="100000"/>
+              <a:buAutoNum type="arabicPeriod"/>
+            </a:pPr>
+            <a:r>
+              <a:rPr lang="en"/>
+              <a:t>How does word length influence trajectory geometry?</a:t>
+            </a:r>
+            <a:endParaRPr/>
+          </a:p>
+          <a:p>
+            <a:pPr marL="457200" lvl="0" indent="-317183" algn="l" rtl="0">
+              <a:lnSpc>
+                <a:spcPct val="200000"/>
+              </a:lnSpc>
+              <a:spcBef>
+                <a:spcPts val="0"/>
+              </a:spcBef>
+              <a:spcAft>
+                <a:spcPts val="0"/>
+              </a:spcAft>
+              <a:buSzPct val="100000"/>
+              <a:buAutoNum type="arabicPeriod"/>
+            </a:pPr>
+            <a:r>
+              <a:rPr lang="en"/>
+              <a:t>How does the number of words stored influence trajectory geometry?</a:t>
+            </a:r>
+            <a:endParaRPr/>
+          </a:p>
+          <a:p>
+            <a:pPr marL="457200" lvl="0" indent="-317183" algn="l" rtl="0">
+              <a:lnSpc>
+                <a:spcPct val="200000"/>
+              </a:lnSpc>
+              <a:spcBef>
+                <a:spcPts val="0"/>
+              </a:spcBef>
+              <a:spcAft>
+                <a:spcPts val="0"/>
+              </a:spcAft>
+              <a:buSzPct val="100000"/>
+              <a:buAutoNum type="arabicPeriod"/>
+            </a:pPr>
+            <a:r>
+              <a:rPr lang="en"/>
+              <a:t>Why does the trajectory geometry look the way it does?</a:t>
+            </a:r>
+            <a:endParaRPr/>
+          </a:p>
+          <a:p>
+            <a:pPr marL="457200" lvl="0" indent="-317183" algn="l" rtl="0">
+              <a:lnSpc>
+                <a:spcPct val="200000"/>
+              </a:lnSpc>
+              <a:spcBef>
+                <a:spcPts val="0"/>
+              </a:spcBef>
+              <a:spcAft>
+                <a:spcPts val="0"/>
+              </a:spcAft>
+              <a:buSzPct val="100000"/>
+              <a:buAutoNum type="arabicPeriod"/>
+            </a:pPr>
+            <a:r>
+              <a:rPr lang="en"/>
+              <a:t>What sort of features (specific token, position in sequence, DFA state) are easily read out of the neural representation?</a:t>
+            </a:r>
+            <a:endParaRPr/>
+          </a:p>
+          <a:p>
+            <a:pPr marL="457200" lvl="0" indent="-317183" algn="l" rtl="0">
+              <a:lnSpc>
+                <a:spcPct val="200000"/>
+              </a:lnSpc>
+              <a:spcBef>
+                <a:spcPts val="0"/>
+              </a:spcBef>
+              <a:spcAft>
+                <a:spcPts val="0"/>
+              </a:spcAft>
+              <a:buSzPct val="100000"/>
+              <a:buAutoNum type="arabicPeriod"/>
+            </a:pPr>
+            <a:r>
+              <a:rPr lang="en"/>
+              <a:t>What sort of features do we see in single-neuron responses?</a:t>
+            </a:r>
+            <a:endParaRPr/>
+          </a:p>
+          <a:p>
+            <a:pPr marL="457200" lvl="0" indent="0" algn="l" rtl="0">
+              <a:spcBef>
+                <a:spcPts val="1200"/>
+              </a:spcBef>
+              <a:spcAft>
+                <a:spcPts val="1200"/>
+              </a:spcAft>
+              <a:buNone/>
+            </a:pPr>
+            <a:endParaRPr/>
+          </a:p>
+        </p:txBody>
+      </p:sp>
+    </p:spTree>
+  </p:cSld>
+  <p:clrMapOvr>
+    <a:masterClrMapping/>
+  </p:clrMapOvr>
+</p:sld>
+</file>
+
 <file path=ppt/slides/slide8.xml><?xml version="1.0" encoding="utf-8"?>
+<p:sld xmlns:a="http://schemas.openxmlformats.org/drawingml/2006/main" xmlns:r="http://schemas.openxmlformats.org/officeDocument/2006/relationships" xmlns:p="http://schemas.openxmlformats.org/presentationml/2006/main">
+  <p:cSld>
+    <p:spTree>
+      <p:nvGrpSpPr>
+        <p:cNvPr id="1" name="Shape 158"/>
+        <p:cNvGrpSpPr/>
+        <p:nvPr/>
+      </p:nvGrpSpPr>
+      <p:grpSpPr>
+        <a:xfrm>
+          <a:off x="0" y="0"/>
+          <a:ext cx="0" cy="0"/>
+          <a:chOff x="0" y="0"/>
+          <a:chExt cx="0" cy="0"/>
+        </a:xfrm>
+      </p:grpSpPr>
+      <p:sp>
+        <p:nvSpPr>
+          <p:cNvPr id="159" name="Google Shape;159;p30"/>
+          <p:cNvSpPr txBox="1">
+            <a:spLocks noGrp="1"/>
+          </p:cNvSpPr>
+          <p:nvPr>
+            <p:ph type="title"/>
+          </p:nvPr>
+        </p:nvSpPr>
+        <p:spPr>
+          <a:xfrm>
+            <a:off x="311700" y="445025"/>
+            <a:ext cx="8520600" cy="572700"/>
+          </a:xfrm>
+          <a:prstGeom prst="rect">
+            <a:avLst/>
+          </a:prstGeom>
+        </p:spPr>
+        <p:txBody>
+          <a:bodyPr spcFirstLastPara="1" wrap="square" lIns="91425" tIns="91425" rIns="91425" bIns="91425" anchor="t" anchorCtr="0">
+            <a:normAutofit fontScale="90000"/>
+          </a:bodyPr>
+          <a:lstStyle/>
+          <a:p>
+            <a:pPr marL="0" lvl="0" indent="0" algn="ctr" rtl="0">
+              <a:spcBef>
+                <a:spcPts val="0"/>
+              </a:spcBef>
+              <a:spcAft>
+                <a:spcPts val="0"/>
+              </a:spcAft>
+              <a:buNone/>
+            </a:pPr>
+            <a:r>
+              <a:rPr lang="en"/>
+              <a:t>Questions be addressed</a:t>
+            </a:r>
+            <a:endParaRPr/>
+          </a:p>
+          <a:p>
+            <a:pPr marL="0" lvl="0" indent="0" algn="ctr" rtl="0">
+              <a:spcBef>
+                <a:spcPts val="0"/>
+              </a:spcBef>
+              <a:spcAft>
+                <a:spcPts val="0"/>
+              </a:spcAft>
+              <a:buNone/>
+            </a:pPr>
+            <a:endParaRPr/>
+          </a:p>
+        </p:txBody>
+      </p:sp>
+      <p:sp>
+        <p:nvSpPr>
+          <p:cNvPr id="160" name="Google Shape;160;p30"/>
+          <p:cNvSpPr txBox="1">
+            <a:spLocks noGrp="1"/>
+          </p:cNvSpPr>
+          <p:nvPr>
+            <p:ph type="body" idx="1"/>
+          </p:nvPr>
+        </p:nvSpPr>
+        <p:spPr>
+          <a:xfrm>
+            <a:off x="311700" y="1152475"/>
+            <a:ext cx="8520600" cy="3762600"/>
+          </a:xfrm>
+          <a:prstGeom prst="rect">
+            <a:avLst/>
+          </a:prstGeom>
+        </p:spPr>
+        <p:txBody>
+          <a:bodyPr spcFirstLastPara="1" wrap="square" lIns="91425" tIns="91425" rIns="91425" bIns="91425" anchor="t" anchorCtr="0">
+            <a:noAutofit/>
+          </a:bodyPr>
+          <a:lstStyle/>
+          <a:p>
+            <a:pPr marL="457200" lvl="0" indent="-361950" algn="l" rtl="0">
+              <a:lnSpc>
+                <a:spcPct val="100000"/>
+              </a:lnSpc>
+              <a:spcBef>
+                <a:spcPts val="0"/>
+              </a:spcBef>
+              <a:spcAft>
+                <a:spcPts val="0"/>
+              </a:spcAft>
+              <a:buSzPts val="2100"/>
+              <a:buAutoNum type="arabicPeriod"/>
+            </a:pPr>
+            <a:r>
+              <a:rPr lang="en" sz="2100"/>
+              <a:t>How is lexical information (word position, character, etc.) represented in a recurrent network that learns to produce words?</a:t>
+            </a:r>
+            <a:endParaRPr sz="2100"/>
+          </a:p>
+          <a:p>
+            <a:pPr marL="457200" lvl="0" indent="0" algn="l" rtl="0">
+              <a:lnSpc>
+                <a:spcPct val="100000"/>
+              </a:lnSpc>
+              <a:spcBef>
+                <a:spcPts val="1200"/>
+              </a:spcBef>
+              <a:spcAft>
+                <a:spcPts val="0"/>
+              </a:spcAft>
+              <a:buNone/>
+            </a:pPr>
+            <a:endParaRPr sz="2100"/>
+          </a:p>
+          <a:p>
+            <a:pPr marL="457200" lvl="0" indent="-361950" algn="l" rtl="0">
+              <a:lnSpc>
+                <a:spcPct val="100000"/>
+              </a:lnSpc>
+              <a:spcBef>
+                <a:spcPts val="1200"/>
+              </a:spcBef>
+              <a:spcAft>
+                <a:spcPts val="0"/>
+              </a:spcAft>
+              <a:buSzPts val="2100"/>
+              <a:buAutoNum type="arabicPeriod"/>
+            </a:pPr>
+            <a:r>
+              <a:rPr lang="en" sz="2100"/>
+              <a:t>How does network’s representation of information change with vocabulary complexity?</a:t>
+            </a:r>
+            <a:endParaRPr sz="2100"/>
+          </a:p>
+          <a:p>
+            <a:pPr marL="457200" lvl="0" indent="0" algn="l" rtl="0">
+              <a:lnSpc>
+                <a:spcPct val="100000"/>
+              </a:lnSpc>
+              <a:spcBef>
+                <a:spcPts val="1200"/>
+              </a:spcBef>
+              <a:spcAft>
+                <a:spcPts val="0"/>
+              </a:spcAft>
+              <a:buNone/>
+            </a:pPr>
+            <a:endParaRPr sz="2100"/>
+          </a:p>
+          <a:p>
+            <a:pPr marL="457200" lvl="0" indent="-361950" algn="l" rtl="0">
+              <a:lnSpc>
+                <a:spcPct val="100000"/>
+              </a:lnSpc>
+              <a:spcBef>
+                <a:spcPts val="1200"/>
+              </a:spcBef>
+              <a:spcAft>
+                <a:spcPts val="0"/>
+              </a:spcAft>
+              <a:buSzPts val="2100"/>
+              <a:buAutoNum type="arabicPeriod"/>
+            </a:pPr>
+            <a:r>
+              <a:rPr lang="en" sz="2100"/>
+              <a:t>How do the network’s </a:t>
+            </a:r>
+            <a:r>
+              <a:rPr lang="en" sz="2100" i="1"/>
+              <a:t>weights </a:t>
+            </a:r>
+            <a:r>
+              <a:rPr lang="en" sz="2100"/>
+              <a:t>differ as a function of the complexity of the learned vocabulary (function-&gt;structure).</a:t>
+            </a:r>
+            <a:endParaRPr sz="2100"/>
+          </a:p>
+          <a:p>
+            <a:pPr marL="457200" lvl="0" indent="0" algn="l" rtl="0">
+              <a:spcBef>
+                <a:spcPts val="1200"/>
+              </a:spcBef>
+              <a:spcAft>
+                <a:spcPts val="1200"/>
+              </a:spcAft>
+              <a:buNone/>
+            </a:pPr>
+            <a:endParaRPr/>
+          </a:p>
+        </p:txBody>
+      </p:sp>
+    </p:spTree>
+  </p:cSld>
+  <p:clrMapOvr>
+    <a:masterClrMapping/>
+  </p:clrMapOvr>
+</p:sld>
+</file>
+
+<file path=ppt/slides/slide9.xml><?xml version="1.0" encoding="utf-8"?>
 <p:sld xmlns:a="http://schemas.openxmlformats.org/drawingml/2006/main" xmlns:r="http://schemas.openxmlformats.org/officeDocument/2006/relationships" xmlns:p="http://schemas.openxmlformats.org/presentationml/2006/main">
   <p:cSld>
     <p:spTree>
@@ -26076,101 +26425,6 @@
           <a:xfrm>
             <a:off x="1658500" y="969203"/>
             <a:ext cx="5827008" cy="3869498"/>
-          </a:xfrm>
-          <a:prstGeom prst="rect">
-            <a:avLst/>
-          </a:prstGeom>
-          <a:noFill/>
-          <a:ln>
-            <a:noFill/>
-          </a:ln>
-        </p:spPr>
-      </p:pic>
-    </p:spTree>
-  </p:cSld>
-  <p:clrMapOvr>
-    <a:masterClrMapping/>
-  </p:clrMapOvr>
-</p:sld>
-</file>
-
-<file path=ppt/slides/slide9.xml><?xml version="1.0" encoding="utf-8"?>
-<p:sld xmlns:a="http://schemas.openxmlformats.org/drawingml/2006/main" xmlns:r="http://schemas.openxmlformats.org/officeDocument/2006/relationships" xmlns:p="http://schemas.openxmlformats.org/presentationml/2006/main">
-  <p:cSld>
-    <p:spTree>
-      <p:nvGrpSpPr>
-        <p:cNvPr id="1" name="Shape 195"/>
-        <p:cNvGrpSpPr/>
-        <p:nvPr/>
-      </p:nvGrpSpPr>
-      <p:grpSpPr>
-        <a:xfrm>
-          <a:off x="0" y="0"/>
-          <a:ext cx="0" cy="0"/>
-          <a:chOff x="0" y="0"/>
-          <a:chExt cx="0" cy="0"/>
-        </a:xfrm>
-      </p:grpSpPr>
-      <p:sp>
-        <p:nvSpPr>
-          <p:cNvPr id="196" name="Google Shape;196;p34"/>
-          <p:cNvSpPr txBox="1">
-            <a:spLocks noGrp="1"/>
-          </p:cNvSpPr>
-          <p:nvPr>
-            <p:ph type="title"/>
-          </p:nvPr>
-        </p:nvSpPr>
-        <p:spPr>
-          <a:xfrm>
-            <a:off x="457200" y="70643"/>
-            <a:ext cx="8229600" cy="857400"/>
-          </a:xfrm>
-          <a:prstGeom prst="rect">
-            <a:avLst/>
-          </a:prstGeom>
-        </p:spPr>
-        <p:txBody>
-          <a:bodyPr spcFirstLastPara="1" wrap="square" lIns="91425" tIns="91425" rIns="91425" bIns="91425" anchor="ctr" anchorCtr="0">
-            <a:noAutofit/>
-          </a:bodyPr>
-          <a:lstStyle/>
-          <a:p>
-            <a:pPr marL="0" lvl="0" indent="0" algn="ctr" rtl="0">
-              <a:spcBef>
-                <a:spcPts val="0"/>
-              </a:spcBef>
-              <a:spcAft>
-                <a:spcPts val="0"/>
-              </a:spcAft>
-              <a:buNone/>
-            </a:pPr>
-            <a:r>
-              <a:rPr lang="en"/>
-              <a:t>Training an RNN</a:t>
-            </a:r>
-            <a:endParaRPr/>
-          </a:p>
-        </p:txBody>
-      </p:sp>
-      <p:pic>
-        <p:nvPicPr>
-          <p:cNvPr id="197" name="Google Shape;197;p34"/>
-          <p:cNvPicPr preferRelativeResize="0"/>
-          <p:nvPr/>
-        </p:nvPicPr>
-        <p:blipFill>
-          <a:blip r:embed="rId3">
-            <a:alphaModFix/>
-          </a:blip>
-          <a:stretch>
-            <a:fillRect/>
-          </a:stretch>
-        </p:blipFill>
-        <p:spPr>
-          <a:xfrm>
-            <a:off x="448788" y="1033358"/>
-            <a:ext cx="8246435" cy="3775321"/>
           </a:xfrm>
           <a:prstGeom prst="rect">
             <a:avLst/>
